--- a/plc_study/PLC_CatalogONE_Presentation.pptx
+++ b/plc_study/PLC_CatalogONE_Presentation.pptx
@@ -14212,8 +14212,8 @@
         </p:nvSpPr>
         <p:spPr>
           <a:xfrm>
-            <a:off x="420624" y="1380744"/>
-            <a:ext cx="5559551" cy="4312642"/>
+            <a:off x="1498980" y="1380744"/>
+            <a:ext cx="3402839" cy="4507992"/>
           </a:xfrm>
           <a:prstGeom prst="rect">
             <a:avLst/>
@@ -14250,7 +14250,7 @@
       </p:sp>
       <p:pic>
         <p:nvPicPr>
-          <p:cNvPr id="8" name="Picture 7" descr="09_modules.png"/>
+          <p:cNvPr id="8" name="Picture 7" descr="09_modules_list.png"/>
           <p:cNvPicPr>
             <a:picLocks noChangeAspect="1"/>
           </p:cNvPicPr>
@@ -14264,8 +14264,8 @@
         </p:blipFill>
         <p:spPr>
           <a:xfrm>
-            <a:off x="457200" y="1417320"/>
-            <a:ext cx="5486399" cy="4239490"/>
+            <a:off x="1535556" y="1417320"/>
+            <a:ext cx="3329687" cy="4434840"/>
           </a:xfrm>
           <a:prstGeom prst="rect">
             <a:avLst/>
@@ -14280,7 +14280,7 @@
         </p:nvSpPr>
         <p:spPr>
           <a:xfrm>
-            <a:off x="457200" y="5711674"/>
+            <a:off x="457200" y="5907024"/>
             <a:ext cx="5486400" cy="411480"/>
           </a:xfrm>
           <a:prstGeom prst="rect">

--- a/plc_study/PLC_CatalogONE_Presentation.pptx
+++ b/plc_study/PLC_CatalogONE_Presentation.pptx
@@ -518,7 +518,7 @@
           <a:lstStyle/>
           <a:p>
             <a:r>
-              <a:t>CatalogONE is the PLC. Dynamics 365 stays the CRM. Walk the manager through that split, then the eight stages, then the publish path.</a:t>
+              <a:t>CatalogONE is the PLC. It publishes to consuming apps and 'the customer's CRM'. Dynamics 365 is named on the Amdocs–Microsoft CEP, not as a CatalogONE connector.</a:t>
             </a:r>
           </a:p>
         </p:txBody>
@@ -588,7 +588,7 @@
           <a:lstStyle/>
           <a:p>
             <a:r>
-              <a:t>Lead with the split the manager cares about: we keep Dynamics.</a:t>
+              <a:t>Do not say CatalogONE sends data to Dynamics. Say: publishes to CRM; CEP names Dynamics.</a:t>
             </a:r>
           </a:p>
         </p:txBody>
@@ -3829,7 +3829,7 @@
         <p:spPr>
           <a:xfrm>
             <a:off x="1005840" y="3749039"/>
-            <a:ext cx="10058400" cy="640080"/>
+            <a:ext cx="10515600" cy="822960"/>
           </a:xfrm>
           <a:prstGeom prst="rect">
             <a:avLst/>
@@ -3844,12 +3844,12 @@
           <a:p>
             <a:pPr algn="l"/>
             <a:r>
-              <a:rPr sz="2200" b="0">
+              <a:rPr sz="2000" b="0">
                 <a:solidFill>
                   <a:srgbClr val="E8F0F8"/>
                 </a:solidFill>
               </a:rPr>
-              <a:t>From idea to Dynamics 365: a catalog-only PLC that publishes into CRM</a:t>
+              <a:t>A catalog-only PLC that publishes to consuming applications — including the customer's CRM</a:t>
             </a:r>
           </a:p>
         </p:txBody>
@@ -3883,7 +3883,7 @@
                   <a:srgbClr val="E8F0F8"/>
                 </a:solidFill>
               </a:rPr>
-              <a:t>Prepared by: [Your name]   |   October 2026</a:t>
+              <a:t>Prepared by: [Your name]   |   October 2026   |   Draft 3</a:t>
             </a:r>
           </a:p>
         </p:txBody>
@@ -3979,7 +3979,7 @@
                   <a:srgbClr val="0C294B"/>
                 </a:solidFill>
               </a:rPr>
-              <a:t>Approval gates: nothing reaches Dynamics by accident</a:t>
+              <a:t>Approval gates: nothing is published by accident</a:t>
             </a:r>
           </a:p>
         </p:txBody>
@@ -4047,7 +4047,7 @@
                   <a:srgbClr val="5F5A6B"/>
                 </a:solidFill>
               </a:rPr>
-              <a:t>PLC study  |  Amdocs CatalogONE: from idea to Dynamics 365</a:t>
+              <a:t>PLC study  |  Amdocs CatalogONE: from idea to CRM</a:t>
             </a:r>
           </a:p>
         </p:txBody>
@@ -5083,7 +5083,7 @@
                   <a:srgbClr val="0C294B"/>
                 </a:solidFill>
               </a:rPr>
-              <a:t>Dynamics consumes the approved product. It never re-creates it.</a:t>
+              <a:t>The catalog publishes. CRM consumes. Two documented facts.</a:t>
             </a:r>
           </a:p>
         </p:txBody>
@@ -5117,7 +5117,7 @@
                   <a:srgbClr val="5F5A6B"/>
                 </a:solidFill>
               </a:rPr>
-              <a:t>CatalogONE is the source of truth. Dynamics 365 is the sales channel.</a:t>
+              <a:t>CatalogONE names CRM. CEP names Dynamics 365. They are not the same sentence.</a:t>
             </a:r>
           </a:p>
         </p:txBody>
@@ -5151,7 +5151,7 @@
                   <a:srgbClr val="5F5A6B"/>
                 </a:solidFill>
               </a:rPr>
-              <a:t>PLC study  |  Amdocs CatalogONE: from idea to Dynamics 365</a:t>
+              <a:t>PLC study  |  Amdocs CatalogONE: from idea to CRM</a:t>
             </a:r>
           </a:p>
         </p:txBody>
@@ -5232,11 +5232,11 @@
           <a:p>
             <a:pPr algn="ctr">
               <a:spcAft>
-                <a:spcPts val="880"/>
+                <a:spcPts val="825"/>
               </a:spcAft>
             </a:pPr>
             <a:r>
-              <a:rPr sz="1600" b="1">
+              <a:rPr sz="1500" b="1">
                 <a:solidFill>
                   <a:srgbClr val="FFFFFF"/>
                 </a:solidFill>
@@ -5247,11 +5247,11 @@
           <a:p>
             <a:pPr algn="ctr">
               <a:spcAft>
-                <a:spcPts val="880"/>
+                <a:spcPts val="825"/>
               </a:spcAft>
             </a:pPr>
             <a:r>
-              <a:rPr sz="1600" b="1">
+              <a:rPr sz="1500" b="1">
                 <a:solidFill>
                   <a:srgbClr val="FFFFFF"/>
                 </a:solidFill>
@@ -5262,11 +5262,11 @@
           <a:p>
             <a:pPr algn="ctr">
               <a:spcAft>
-                <a:spcPts val="880"/>
+                <a:spcPts val="825"/>
               </a:spcAft>
             </a:pPr>
             <a:r>
-              <a:rPr sz="1600" b="1">
+              <a:rPr sz="1500" b="1">
                 <a:solidFill>
                   <a:srgbClr val="FFFFFF"/>
                 </a:solidFill>
@@ -5277,16 +5277,16 @@
           <a:p>
             <a:pPr algn="ctr">
               <a:spcAft>
-                <a:spcPts val="880"/>
+                <a:spcPts val="825"/>
               </a:spcAft>
             </a:pPr>
             <a:r>
-              <a:rPr sz="1600" b="1">
+              <a:rPr sz="1500" b="1">
                 <a:solidFill>
                   <a:srgbClr val="FFFFFF"/>
                 </a:solidFill>
               </a:rPr>
-              <a:t>Only Active products are published</a:t>
+              <a:t>Publishes Active products to consuming applications</a:t>
             </a:r>
           </a:p>
         </p:txBody>
@@ -5751,41 +5751,41 @@
           <a:p>
             <a:pPr algn="ctr">
               <a:spcAft>
-                <a:spcPts val="825"/>
+                <a:spcPts val="770"/>
               </a:spcAft>
             </a:pPr>
             <a:r>
-              <a:rPr sz="1500" b="1">
+              <a:rPr sz="1400" b="1">
                 <a:solidFill>
                   <a:srgbClr val="FFFFFF"/>
                 </a:solidFill>
               </a:rPr>
-              <a:t>Dynamics 365</a:t>
+              <a:t>Customer's CRM</a:t>
             </a:r>
           </a:p>
           <a:p>
             <a:pPr algn="ctr">
               <a:spcAft>
-                <a:spcPts val="825"/>
+                <a:spcPts val="770"/>
               </a:spcAft>
             </a:pPr>
             <a:r>
-              <a:rPr sz="1500" b="1">
+              <a:rPr sz="1400" b="1">
                 <a:solidFill>
                   <a:srgbClr val="FFFFFF"/>
                 </a:solidFill>
               </a:rPr>
-              <a:t>Sales</a:t>
+              <a:t>(unnamed on CatalogONE)</a:t>
             </a:r>
           </a:p>
           <a:p>
             <a:pPr algn="ctr">
               <a:spcAft>
-                <a:spcPts val="825"/>
+                <a:spcPts val="770"/>
               </a:spcAft>
             </a:pPr>
             <a:r>
-              <a:rPr sz="1500" b="1">
+              <a:rPr sz="1400" b="1">
                 <a:solidFill>
                   <a:srgbClr val="FFFFFF"/>
                 </a:solidFill>
@@ -5796,16 +5796,16 @@
           <a:p>
             <a:pPr algn="ctr">
               <a:spcAft>
-                <a:spcPts val="825"/>
+                <a:spcPts val="770"/>
               </a:spcAft>
             </a:pPr>
             <a:r>
-              <a:rPr sz="1500" b="1">
+              <a:rPr sz="1400" b="1">
                 <a:solidFill>
                   <a:srgbClr val="FFFFFF"/>
                 </a:solidFill>
               </a:rPr>
-              <a:t>Quote, order and contract use the catalog definition</a:t>
+              <a:t>Dynamics 365 only where CEP is the platform</a:t>
             </a:r>
           </a:p>
         </p:txBody>
@@ -5839,7 +5839,7 @@
                   <a:srgbClr val="5F5A6B"/>
                 </a:solidFill>
               </a:rPr>
-              <a:t>Amdocs–Microsoft CEP: "unified Catalog, CPQ, Commerce and Order Management" plus "Dynamics 365 modules focused on sales, marketing, and customer service". CatalogONE Centralized publishes to consuming applications.</a:t>
+              <a:t>Fact 1 — CatalogONE: "publishing catalog information to multiple consuming applications" and "integration to … the customer's CRM solution". Fact 2 — CEP: unified Catalog plus "Dynamics 365 modules focused on sales, marketing, and customer service".</a:t>
             </a:r>
           </a:p>
         </p:txBody>
@@ -5935,7 +5935,7 @@
                   <a:srgbClr val="0C294B"/>
                 </a:solidFill>
               </a:rPr>
-              <a:t>How the hand-over works</a:t>
+              <a:t>How CatalogONE publishes — destination is CRM, not named as Dynamics</a:t>
             </a:r>
           </a:p>
         </p:txBody>
@@ -6003,7 +6003,7 @@
                   <a:srgbClr val="5F5A6B"/>
                 </a:solidFill>
               </a:rPr>
-              <a:t>PLC study  |  Amdocs CatalogONE: from idea to Dynamics 365</a:t>
+              <a:t>PLC study  |  Amdocs CatalogONE: from idea to CRM</a:t>
             </a:r>
           </a:p>
         </p:txBody>
@@ -6062,8 +6062,8 @@
               </a:tblPr>
               <a:tblGrid>
                 <a:gridCol w="3017520"/>
-                <a:gridCol w="2377440"/>
-                <a:gridCol w="5760720"/>
+                <a:gridCol w="2926080"/>
+                <a:gridCol w="5212080"/>
               </a:tblGrid>
               <a:tr h="457200">
                 <a:tc>
@@ -6163,7 +6163,7 @@
                             <a:srgbClr val="26222E"/>
                           </a:solidFill>
                         </a:rPr>
-                        <a:t>Catalog to Dynamics</a:t>
+                        <a:t>Catalog → consuming apps</a:t>
                       </a:r>
                     </a:p>
                   </a:txBody>
@@ -6228,7 +6228,7 @@
                             <a:srgbClr val="26222E"/>
                           </a:solidFill>
                         </a:rPr>
-                        <a:t>Catalog to Dynamics</a:t>
+                        <a:t>Catalog → downstream systems</a:t>
                       </a:r>
                     </a:p>
                   </a:txBody>
@@ -6293,7 +6293,7 @@
                             <a:srgbClr val="26222E"/>
                           </a:solidFill>
                         </a:rPr>
-                        <a:t>Catalog to Dynamics</a:t>
+                        <a:t>Catalog → any TMF consumer</a:t>
                       </a:r>
                     </a:p>
                   </a:txBody>
@@ -6358,7 +6358,7 @@
                             <a:srgbClr val="26222E"/>
                           </a:solidFill>
                         </a:rPr>
-                        <a:t>Catalog to Dynamics</a:t>
+                        <a:t>Catalog → subscribers</a:t>
                       </a:r>
                     </a:p>
                   </a:txBody>
@@ -6423,7 +6423,7 @@
                             <a:srgbClr val="26222E"/>
                           </a:solidFill>
                         </a:rPr>
-                        <a:t>Dynamics to catalog</a:t>
+                        <a:t>CRM / CPQ → catalog</a:t>
                       </a:r>
                     </a:p>
                   </a:txBody>
@@ -6488,7 +6488,7 @@
                             <a:srgbClr val="26222E"/>
                           </a:solidFill>
                         </a:rPr>
-                        <a:t>Dynamics to order mgmt</a:t>
+                        <a:t>CRM / CPQ → order mgmt</a:t>
                       </a:r>
                     </a:p>
                   </a:txBody>
@@ -6747,7 +6747,7 @@
                   <a:srgbClr val="FFFFFF"/>
                 </a:solidFill>
               </a:rPr>
-              <a:t>Dynamics reads TMF620</a:t>
+              <a:t>CRM reads TMF620</a:t>
             </a:r>
           </a:p>
         </p:txBody>
@@ -6835,7 +6835,7 @@
                   <a:srgbClr val="FFFFFF"/>
                 </a:solidFill>
               </a:rPr>
-              <a:t>AM quotes in Sales</a:t>
+              <a:t>AM quotes in CRM</a:t>
             </a:r>
           </a:p>
         </p:txBody>
@@ -7019,7 +7019,7 @@
                   <a:srgbClr val="0C294B"/>
                 </a:solidFill>
               </a:rPr>
-              <a:t>What sits around the catalog</a:t>
+              <a:t>What sits around the catalog — on CEP, not on a CatalogONE datasheet</a:t>
             </a:r>
           </a:p>
         </p:txBody>
@@ -7053,7 +7053,7 @@
                   <a:srgbClr val="5F5A6B"/>
                 </a:solidFill>
               </a:rPr>
-              <a:t>Digital Enterprise Catalog (Amdocs) and Sales management (Dynamics) on one platform</a:t>
+              <a:t>Digital Enterprise Catalog (Amdocs) and Sales management (Dynamics 365) on one CEP platform</a:t>
             </a:r>
           </a:p>
         </p:txBody>
@@ -7087,7 +7087,7 @@
                   <a:srgbClr val="5F5A6B"/>
                 </a:solidFill>
               </a:rPr>
-              <a:t>PLC study  |  Amdocs CatalogONE: from idea to Dynamics 365</a:t>
+              <a:t>PLC study  |  Amdocs CatalogONE: from idea to CRM</a:t>
             </a:r>
           </a:p>
         </p:txBody>
@@ -7387,7 +7387,7 @@
                   <a:srgbClr val="5F5A6B"/>
                 </a:solidFill>
               </a:rPr>
-              <a:t>PLC study  |  Amdocs CatalogONE: from idea to Dynamics 365</a:t>
+              <a:t>PLC study  |  Amdocs CatalogONE: from idea to CRM</a:t>
             </a:r>
           </a:p>
         </p:txBody>
@@ -7577,7 +7577,7 @@
                   <a:srgbClr val="5F5A6B"/>
                 </a:solidFill>
               </a:rPr>
-              <a:t>In CatalogONE, not in Dynamics</a:t>
+              <a:t>In CatalogONE, not in CRM</a:t>
             </a:r>
           </a:p>
         </p:txBody>
@@ -7855,7 +7855,7 @@
                   <a:srgbClr val="0C294B"/>
                 </a:solidFill>
               </a:rPr>
-              <a:t>Event to Dynamics</a:t>
+              <a:t>Event to CRM</a:t>
             </a:r>
           </a:p>
         </p:txBody>
@@ -8270,7 +8270,7 @@
                   <a:srgbClr val="0C294B"/>
                 </a:solidFill>
               </a:rPr>
-              <a:t>Dynamics side: </a:t>
+              <a:t>If the CRM is Dynamics 365 [E]: </a:t>
             </a:r>
             <a:r>
               <a:rPr sz="1500">
@@ -8278,7 +8278,7 @@
                   <a:srgbClr val="26222E"/>
                 </a:solidFill>
               </a:rPr>
-              <a:t>new version maps to Under Revision, then Active. Retired catalog versions are Retired in Dynamics and drop off the quote screen.</a:t>
+              <a:t>new version maps to Under Revision, then Active. Retired catalog versions are Retired and drop off the quote screen.</a:t>
             </a:r>
           </a:p>
           <a:p>
@@ -8397,7 +8397,7 @@
                   <a:srgbClr val="0C294B"/>
                 </a:solidFill>
               </a:rPr>
-              <a:t>Mapping CatalogONE onto Dynamics 365 Sales</a:t>
+              <a:t>Example only: TMF620 items on Dynamics 365 Sales [E]</a:t>
             </a:r>
           </a:p>
         </p:txBody>
@@ -8431,7 +8431,7 @@
                   <a:srgbClr val="5F5A6B"/>
                 </a:solidFill>
               </a:rPr>
-              <a:t>Study, design, test and approval stay in the catalog. Dynamics receives sellable products.</a:t>
+              <a:t>Not a vendor connector spec. Same pattern as any TMF620 catalog, if Dynamics is the CRM.</a:t>
             </a:r>
           </a:p>
         </p:txBody>
@@ -8465,7 +8465,7 @@
                   <a:srgbClr val="5F5A6B"/>
                 </a:solidFill>
               </a:rPr>
-              <a:t>PLC study  |  Amdocs CatalogONE: from idea to Dynamics 365</a:t>
+              <a:t>PLC study  |  Amdocs CatalogONE: from idea to CRM</a:t>
             </a:r>
           </a:p>
         </p:txBody>
@@ -8662,7 +8662,7 @@
                   <a:srgbClr val="FFFFFF"/>
                 </a:solidFill>
               </a:rPr>
-              <a:t>CEP / Dataverse</a:t>
+              <a:t>Integration</a:t>
             </a:r>
           </a:p>
           <a:p>
@@ -8677,7 +8677,7 @@
                   <a:srgbClr val="FFFFFF"/>
                 </a:solidFill>
               </a:rPr>
-              <a:t>maps and syncs</a:t>
+              <a:t>maps into Dataverse</a:t>
             </a:r>
           </a:p>
         </p:txBody>
@@ -8818,7 +8818,7 @@
                   <a:srgbClr val="5F5A6B"/>
                 </a:solidFill>
               </a:rPr>
-              <a:t>Pre-built in the Amdocs–Microsoft platform; not a custom CRM replacement</a:t>
+              <a:t>Pre-built Catalog+Dynamics is CEP. Not a CatalogONE AppSource connector.</a:t>
             </a:r>
           </a:p>
         </p:txBody>
@@ -8857,7 +8857,7 @@
                             <a:srgbClr val="FFFFFF"/>
                           </a:solidFill>
                         </a:rPr>
-                        <a:t>CatalogONE / TMF620</a:t>
+                        <a:t>Catalog / TMF620 item</a:t>
                       </a:r>
                     </a:p>
                   </a:txBody>
@@ -8878,7 +8878,7 @@
                             <a:srgbClr val="FFFFFF"/>
                           </a:solidFill>
                         </a:rPr>
-                        <a:t>Dynamics 365 Sales entity</a:t>
+                        <a:t>Dynamics 365 Sales entity [M] — example [E]</a:t>
                       </a:r>
                     </a:p>
                   </a:txBody>
@@ -9142,7 +9142,7 @@
                   <a:srgbClr val="0C294B"/>
                 </a:solidFill>
               </a:rPr>
-              <a:t>Dynamics statuses are Draft, Active, Under Revision, Retired. Everything before Active stays in CatalogONE.</a:t>
+              <a:t>Two paths: buy CEP (Catalog next to Dynamics, documented) or keep Dynamics and integrate via TMF620 / Kafka (CatalogONE pattern for any CRM).</a:t>
             </a:r>
           </a:p>
         </p:txBody>
@@ -9251,8 +9251,8 @@
         </p:nvSpPr>
         <p:spPr>
           <a:xfrm>
-            <a:off x="548640" y="6446520"/>
-            <a:ext cx="8686800" cy="274320"/>
+            <a:off x="548640" y="914400"/>
+            <a:ext cx="10972800" cy="411480"/>
           </a:xfrm>
           <a:prstGeom prst="rect">
             <a:avLst/>
@@ -9267,12 +9267,12 @@
           <a:p>
             <a:pPr algn="l"/>
             <a:r>
-              <a:rPr sz="1000" b="0">
+              <a:rPr sz="1500" b="0">
                 <a:solidFill>
                   <a:srgbClr val="5F5A6B"/>
                 </a:solidFill>
               </a:rPr>
-              <a:t>PLC study  |  Amdocs CatalogONE: from idea to Dynamics 365</a:t>
+              <a:t>CatalogONE cases first. PLDT is CEP customer care with Dynamics 365 — not a CatalogONE catalog feed.</a:t>
             </a:r>
           </a:p>
         </p:txBody>
@@ -9285,8 +9285,8 @@
         </p:nvSpPr>
         <p:spPr>
           <a:xfrm>
-            <a:off x="10698480" y="6446520"/>
-            <a:ext cx="914400" cy="274320"/>
+            <a:off x="548640" y="6446520"/>
+            <a:ext cx="8686800" cy="274320"/>
           </a:xfrm>
           <a:prstGeom prst="rect">
             <a:avLst/>
@@ -9299,6 +9299,40 @@
           </a:bodyPr>
           <a:lstStyle/>
           <a:p>
+            <a:pPr algn="l"/>
+            <a:r>
+              <a:rPr sz="1000" b="0">
+                <a:solidFill>
+                  <a:srgbClr val="5F5A6B"/>
+                </a:solidFill>
+              </a:rPr>
+              <a:t>PLC study  |  Amdocs CatalogONE: from idea to CRM</a:t>
+            </a:r>
+          </a:p>
+        </p:txBody>
+      </p:sp>
+      <p:sp>
+        <p:nvSpPr>
+          <p:cNvPr id="6" name="TextBox 5"/>
+          <p:cNvSpPr txBox="1"/>
+          <p:nvPr/>
+        </p:nvSpPr>
+        <p:spPr>
+          <a:xfrm>
+            <a:off x="10698480" y="6446520"/>
+            <a:ext cx="914400" cy="274320"/>
+          </a:xfrm>
+          <a:prstGeom prst="rect">
+            <a:avLst/>
+          </a:prstGeom>
+          <a:noFill/>
+        </p:spPr>
+        <p:txBody>
+          <a:bodyPr wrap="square" anchor="t" lIns="73152" rIns="73152" tIns="36576" bIns="36576">
+            <a:spAutoFit/>
+          </a:bodyPr>
+          <a:lstStyle/>
+          <a:p>
             <a:pPr algn="r"/>
             <a:r>
               <a:rPr sz="1000" b="0">
@@ -9313,14 +9347,14 @@
       </p:sp>
       <p:sp>
         <p:nvSpPr>
-          <p:cNvPr id="6" name="Rectangle 5"/>
+          <p:cNvPr id="7" name="Rectangle 6"/>
           <p:cNvSpPr/>
           <p:nvPr/>
         </p:nvSpPr>
         <p:spPr>
           <a:xfrm>
-            <a:off x="502920" y="1325880"/>
-            <a:ext cx="6858000" cy="1115568"/>
+            <a:off x="502920" y="1371600"/>
+            <a:ext cx="6858000" cy="1024128"/>
           </a:xfrm>
           <a:prstGeom prst="rect">
             <a:avLst/>
@@ -9357,14 +9391,14 @@
       </p:sp>
       <p:sp>
         <p:nvSpPr>
-          <p:cNvPr id="7" name="Rectangle 6"/>
+          <p:cNvPr id="8" name="Rectangle 7"/>
           <p:cNvSpPr/>
           <p:nvPr/>
         </p:nvSpPr>
         <p:spPr>
           <a:xfrm>
-            <a:off x="502920" y="1325880"/>
-            <a:ext cx="109728" cy="1115568"/>
+            <a:off x="502920" y="1371600"/>
+            <a:ext cx="109728" cy="1024128"/>
           </a:xfrm>
           <a:prstGeom prst="rect">
             <a:avLst/>
@@ -9401,14 +9435,14 @@
       </p:sp>
       <p:sp>
         <p:nvSpPr>
-          <p:cNvPr id="8" name="TextBox 7"/>
+          <p:cNvPr id="9" name="TextBox 8"/>
           <p:cNvSpPr txBox="1"/>
           <p:nvPr/>
         </p:nvSpPr>
         <p:spPr>
           <a:xfrm>
-            <a:off x="777240" y="1399032"/>
-            <a:ext cx="6446520" cy="320040"/>
+            <a:off x="777240" y="1426464"/>
+            <a:ext cx="6446520" cy="292608"/>
           </a:xfrm>
           <a:prstGeom prst="rect">
             <a:avLst/>
@@ -9423,7 +9457,7 @@
           <a:p>
             <a:pPr algn="l"/>
             <a:r>
-              <a:rPr sz="1800" b="1">
+              <a:rPr sz="1600" b="1">
                 <a:solidFill>
                   <a:srgbClr val="0C294B"/>
                 </a:solidFill>
@@ -9435,14 +9469,14 @@
       </p:sp>
       <p:sp>
         <p:nvSpPr>
-          <p:cNvPr id="9" name="TextBox 8"/>
+          <p:cNvPr id="10" name="TextBox 9"/>
           <p:cNvSpPr txBox="1"/>
           <p:nvPr/>
         </p:nvSpPr>
         <p:spPr>
           <a:xfrm>
-            <a:off x="777240" y="1709928"/>
-            <a:ext cx="6446520" cy="256032"/>
+            <a:off x="777240" y="1700784"/>
+            <a:ext cx="6446520" cy="237744"/>
           </a:xfrm>
           <a:prstGeom prst="rect">
             <a:avLst/>
@@ -9469,14 +9503,14 @@
       </p:sp>
       <p:sp>
         <p:nvSpPr>
-          <p:cNvPr id="10" name="TextBox 9"/>
+          <p:cNvPr id="11" name="TextBox 10"/>
           <p:cNvSpPr txBox="1"/>
           <p:nvPr/>
         </p:nvSpPr>
         <p:spPr>
           <a:xfrm>
-            <a:off x="777240" y="1984248"/>
-            <a:ext cx="6446520" cy="384048"/>
+            <a:off x="777240" y="1975104"/>
+            <a:ext cx="6446520" cy="347472"/>
           </a:xfrm>
           <a:prstGeom prst="rect">
             <a:avLst/>
@@ -9491,7 +9525,7 @@
           <a:p>
             <a:pPr algn="l"/>
             <a:r>
-              <a:rPr sz="1400" b="1">
+              <a:rPr sz="1300" b="1">
                 <a:solidFill>
                   <a:srgbClr val="26222E"/>
                 </a:solidFill>
@@ -9503,14 +9537,14 @@
       </p:sp>
       <p:sp>
         <p:nvSpPr>
-          <p:cNvPr id="11" name="Rectangle 10"/>
+          <p:cNvPr id="12" name="Rectangle 11"/>
           <p:cNvSpPr/>
           <p:nvPr/>
         </p:nvSpPr>
         <p:spPr>
           <a:xfrm>
-            <a:off x="502920" y="2560320"/>
-            <a:ext cx="6858000" cy="1115568"/>
+            <a:off x="502920" y="2487168"/>
+            <a:ext cx="6858000" cy="1024128"/>
           </a:xfrm>
           <a:prstGeom prst="rect">
             <a:avLst/>
@@ -9547,14 +9581,14 @@
       </p:sp>
       <p:sp>
         <p:nvSpPr>
-          <p:cNvPr id="12" name="Rectangle 11"/>
+          <p:cNvPr id="13" name="Rectangle 12"/>
           <p:cNvSpPr/>
           <p:nvPr/>
         </p:nvSpPr>
         <p:spPr>
           <a:xfrm>
-            <a:off x="502920" y="2560320"/>
-            <a:ext cx="109728" cy="1115568"/>
+            <a:off x="502920" y="2487168"/>
+            <a:ext cx="109728" cy="1024128"/>
           </a:xfrm>
           <a:prstGeom prst="rect">
             <a:avLst/>
@@ -9591,14 +9625,14 @@
       </p:sp>
       <p:sp>
         <p:nvSpPr>
-          <p:cNvPr id="13" name="TextBox 12"/>
+          <p:cNvPr id="14" name="TextBox 13"/>
           <p:cNvSpPr txBox="1"/>
           <p:nvPr/>
         </p:nvSpPr>
         <p:spPr>
           <a:xfrm>
-            <a:off x="777240" y="2633472"/>
-            <a:ext cx="6446520" cy="320040"/>
+            <a:off x="777240" y="2542032"/>
+            <a:ext cx="6446520" cy="292608"/>
           </a:xfrm>
           <a:prstGeom prst="rect">
             <a:avLst/>
@@ -9613,7 +9647,7 @@
           <a:p>
             <a:pPr algn="l"/>
             <a:r>
-              <a:rPr sz="1800" b="1">
+              <a:rPr sz="1600" b="1">
                 <a:solidFill>
                   <a:srgbClr val="0C294B"/>
                 </a:solidFill>
@@ -9625,14 +9659,14 @@
       </p:sp>
       <p:sp>
         <p:nvSpPr>
-          <p:cNvPr id="14" name="TextBox 13"/>
+          <p:cNvPr id="15" name="TextBox 14"/>
           <p:cNvSpPr txBox="1"/>
           <p:nvPr/>
         </p:nvSpPr>
         <p:spPr>
           <a:xfrm>
-            <a:off x="777240" y="2944368"/>
-            <a:ext cx="6446520" cy="256032"/>
+            <a:off x="777240" y="2816352"/>
+            <a:ext cx="6446520" cy="237744"/>
           </a:xfrm>
           <a:prstGeom prst="rect">
             <a:avLst/>
@@ -9659,14 +9693,14 @@
       </p:sp>
       <p:sp>
         <p:nvSpPr>
-          <p:cNvPr id="15" name="TextBox 14"/>
+          <p:cNvPr id="16" name="TextBox 15"/>
           <p:cNvSpPr txBox="1"/>
           <p:nvPr/>
         </p:nvSpPr>
         <p:spPr>
           <a:xfrm>
-            <a:off x="777240" y="3218688"/>
-            <a:ext cx="6446520" cy="384048"/>
+            <a:off x="777240" y="3090672"/>
+            <a:ext cx="6446520" cy="347472"/>
           </a:xfrm>
           <a:prstGeom prst="rect">
             <a:avLst/>
@@ -9681,7 +9715,7 @@
           <a:p>
             <a:pPr algn="l"/>
             <a:r>
-              <a:rPr sz="1400" b="1">
+              <a:rPr sz="1300" b="1">
                 <a:solidFill>
                   <a:srgbClr val="26222E"/>
                 </a:solidFill>
@@ -9693,14 +9727,14 @@
       </p:sp>
       <p:sp>
         <p:nvSpPr>
-          <p:cNvPr id="16" name="Rectangle 15"/>
+          <p:cNvPr id="17" name="Rectangle 16"/>
           <p:cNvSpPr/>
           <p:nvPr/>
         </p:nvSpPr>
         <p:spPr>
           <a:xfrm>
-            <a:off x="502920" y="3794760"/>
-            <a:ext cx="6858000" cy="1115568"/>
+            <a:off x="502920" y="3602736"/>
+            <a:ext cx="6858000" cy="1024128"/>
           </a:xfrm>
           <a:prstGeom prst="rect">
             <a:avLst/>
@@ -9737,14 +9771,14 @@
       </p:sp>
       <p:sp>
         <p:nvSpPr>
-          <p:cNvPr id="17" name="Rectangle 16"/>
+          <p:cNvPr id="18" name="Rectangle 17"/>
           <p:cNvSpPr/>
           <p:nvPr/>
         </p:nvSpPr>
         <p:spPr>
           <a:xfrm>
-            <a:off x="502920" y="3794760"/>
-            <a:ext cx="109728" cy="1115568"/>
+            <a:off x="502920" y="3602736"/>
+            <a:ext cx="109728" cy="1024128"/>
           </a:xfrm>
           <a:prstGeom prst="rect">
             <a:avLst/>
@@ -9781,14 +9815,14 @@
       </p:sp>
       <p:sp>
         <p:nvSpPr>
-          <p:cNvPr id="18" name="TextBox 17"/>
+          <p:cNvPr id="19" name="TextBox 18"/>
           <p:cNvSpPr txBox="1"/>
           <p:nvPr/>
         </p:nvSpPr>
         <p:spPr>
           <a:xfrm>
-            <a:off x="777240" y="3867912"/>
-            <a:ext cx="6446520" cy="320040"/>
+            <a:off x="777240" y="3657600"/>
+            <a:ext cx="6446520" cy="292608"/>
           </a:xfrm>
           <a:prstGeom prst="rect">
             <a:avLst/>
@@ -9803,7 +9837,7 @@
           <a:p>
             <a:pPr algn="l"/>
             <a:r>
-              <a:rPr sz="1800" b="1">
+              <a:rPr sz="1600" b="1">
                 <a:solidFill>
                   <a:srgbClr val="0C294B"/>
                 </a:solidFill>
@@ -9815,14 +9849,14 @@
       </p:sp>
       <p:sp>
         <p:nvSpPr>
-          <p:cNvPr id="19" name="TextBox 18"/>
+          <p:cNvPr id="20" name="TextBox 19"/>
           <p:cNvSpPr txBox="1"/>
           <p:nvPr/>
         </p:nvSpPr>
         <p:spPr>
           <a:xfrm>
-            <a:off x="777240" y="4178808"/>
-            <a:ext cx="6446520" cy="256032"/>
+            <a:off x="777240" y="3931920"/>
+            <a:ext cx="6446520" cy="237744"/>
           </a:xfrm>
           <a:prstGeom prst="rect">
             <a:avLst/>
@@ -9849,14 +9883,14 @@
       </p:sp>
       <p:sp>
         <p:nvSpPr>
-          <p:cNvPr id="20" name="TextBox 19"/>
+          <p:cNvPr id="21" name="TextBox 20"/>
           <p:cNvSpPr txBox="1"/>
           <p:nvPr/>
         </p:nvSpPr>
         <p:spPr>
           <a:xfrm>
-            <a:off x="777240" y="4453128"/>
-            <a:ext cx="6446520" cy="384048"/>
+            <a:off x="777240" y="4206240"/>
+            <a:ext cx="6446520" cy="347472"/>
           </a:xfrm>
           <a:prstGeom prst="rect">
             <a:avLst/>
@@ -9871,7 +9905,7 @@
           <a:p>
             <a:pPr algn="l"/>
             <a:r>
-              <a:rPr sz="1400" b="1">
+              <a:rPr sz="1300" b="1">
                 <a:solidFill>
                   <a:srgbClr val="26222E"/>
                 </a:solidFill>
@@ -9883,14 +9917,204 @@
       </p:sp>
       <p:sp>
         <p:nvSpPr>
-          <p:cNvPr id="21" name="Rectangle 20"/>
+          <p:cNvPr id="22" name="Rectangle 21"/>
           <p:cNvSpPr/>
           <p:nvPr/>
         </p:nvSpPr>
         <p:spPr>
           <a:xfrm>
-            <a:off x="7922172" y="1243584"/>
-            <a:ext cx="3403775" cy="4782312"/>
+            <a:off x="502920" y="4718304"/>
+            <a:ext cx="6858000" cy="1024128"/>
+          </a:xfrm>
+          <a:prstGeom prst="rect">
+            <a:avLst/>
+          </a:prstGeom>
+          <a:solidFill>
+            <a:srgbClr val="E8F0F8"/>
+          </a:solidFill>
+          <a:ln>
+            <a:noFill/>
+          </a:ln>
+          <a:effectLst/>
+        </p:spPr>
+        <p:style>
+          <a:lnRef idx="1">
+            <a:schemeClr val="accent1"/>
+          </a:lnRef>
+          <a:fillRef idx="3">
+            <a:schemeClr val="accent1"/>
+          </a:fillRef>
+          <a:effectRef idx="2">
+            <a:schemeClr val="accent1"/>
+          </a:effectRef>
+          <a:fontRef idx="minor">
+            <a:schemeClr val="lt1"/>
+          </a:fontRef>
+        </p:style>
+        <p:txBody>
+          <a:bodyPr rtlCol="0" anchor="ctr"/>
+          <a:lstStyle/>
+          <a:p>
+            <a:pPr algn="ctr"/>
+          </a:p>
+        </p:txBody>
+      </p:sp>
+      <p:sp>
+        <p:nvSpPr>
+          <p:cNvPr id="23" name="Rectangle 22"/>
+          <p:cNvSpPr/>
+          <p:nvPr/>
+        </p:nvSpPr>
+        <p:spPr>
+          <a:xfrm>
+            <a:off x="502920" y="4718304"/>
+            <a:ext cx="109728" cy="1024128"/>
+          </a:xfrm>
+          <a:prstGeom prst="rect">
+            <a:avLst/>
+          </a:prstGeom>
+          <a:solidFill>
+            <a:srgbClr val="0078D4"/>
+          </a:solidFill>
+          <a:ln>
+            <a:noFill/>
+          </a:ln>
+          <a:effectLst/>
+        </p:spPr>
+        <p:style>
+          <a:lnRef idx="1">
+            <a:schemeClr val="accent1"/>
+          </a:lnRef>
+          <a:fillRef idx="3">
+            <a:schemeClr val="accent1"/>
+          </a:fillRef>
+          <a:effectRef idx="2">
+            <a:schemeClr val="accent1"/>
+          </a:effectRef>
+          <a:fontRef idx="minor">
+            <a:schemeClr val="lt1"/>
+          </a:fontRef>
+        </p:style>
+        <p:txBody>
+          <a:bodyPr rtlCol="0" anchor="ctr"/>
+          <a:lstStyle/>
+          <a:p>
+            <a:pPr algn="ctr"/>
+          </a:p>
+        </p:txBody>
+      </p:sp>
+      <p:sp>
+        <p:nvSpPr>
+          <p:cNvPr id="24" name="TextBox 23"/>
+          <p:cNvSpPr txBox="1"/>
+          <p:nvPr/>
+        </p:nvSpPr>
+        <p:spPr>
+          <a:xfrm>
+            <a:off x="777240" y="4773168"/>
+            <a:ext cx="6446520" cy="292608"/>
+          </a:xfrm>
+          <a:prstGeom prst="rect">
+            <a:avLst/>
+          </a:prstGeom>
+          <a:noFill/>
+        </p:spPr>
+        <p:txBody>
+          <a:bodyPr wrap="square" anchor="t" lIns="73152" rIns="73152" tIns="36576" bIns="36576">
+            <a:spAutoFit/>
+          </a:bodyPr>
+          <a:lstStyle/>
+          <a:p>
+            <a:pPr algn="l"/>
+            <a:r>
+              <a:rPr sz="1600" b="1">
+                <a:solidFill>
+                  <a:srgbClr val="0C294B"/>
+                </a:solidFill>
+              </a:rPr>
+              <a:t>PLDT (Philippines)</a:t>
+            </a:r>
+          </a:p>
+        </p:txBody>
+      </p:sp>
+      <p:sp>
+        <p:nvSpPr>
+          <p:cNvPr id="25" name="TextBox 24"/>
+          <p:cNvSpPr txBox="1"/>
+          <p:nvPr/>
+        </p:nvSpPr>
+        <p:spPr>
+          <a:xfrm>
+            <a:off x="777240" y="5047488"/>
+            <a:ext cx="6446520" cy="237744"/>
+          </a:xfrm>
+          <a:prstGeom prst="rect">
+            <a:avLst/>
+          </a:prstGeom>
+          <a:noFill/>
+        </p:spPr>
+        <p:txBody>
+          <a:bodyPr wrap="square" anchor="t" lIns="73152" rIns="73152" tIns="36576" bIns="36576">
+            <a:spAutoFit/>
+          </a:bodyPr>
+          <a:lstStyle/>
+          <a:p>
+            <a:pPr algn="l"/>
+            <a:r>
+              <a:rPr sz="1200" b="0">
+                <a:solidFill>
+                  <a:srgbClr val="5F5A6B"/>
+                </a:solidFill>
+              </a:rPr>
+              <a:t>CEP Unified Case Management — agents use Dynamics 365</a:t>
+            </a:r>
+          </a:p>
+        </p:txBody>
+      </p:sp>
+      <p:sp>
+        <p:nvSpPr>
+          <p:cNvPr id="26" name="TextBox 25"/>
+          <p:cNvSpPr txBox="1"/>
+          <p:nvPr/>
+        </p:nvSpPr>
+        <p:spPr>
+          <a:xfrm>
+            <a:off x="777240" y="5321808"/>
+            <a:ext cx="6446520" cy="347472"/>
+          </a:xfrm>
+          <a:prstGeom prst="rect">
+            <a:avLst/>
+          </a:prstGeom>
+          <a:noFill/>
+        </p:spPr>
+        <p:txBody>
+          <a:bodyPr wrap="square" anchor="t" lIns="73152" rIns="73152" tIns="36576" bIns="36576">
+            <a:spAutoFit/>
+          </a:bodyPr>
+          <a:lstStyle/>
+          <a:p>
+            <a:pPr algn="l"/>
+            <a:r>
+              <a:rPr sz="1300" b="1">
+                <a:solidFill>
+                  <a:srgbClr val="26222E"/>
+                </a:solidFill>
+              </a:rPr>
+              <a:t>IDC: 6 weeks; 48% faster L1; +27 NPS. Care, not catalog publish.</a:t>
+            </a:r>
+          </a:p>
+        </p:txBody>
+      </p:sp>
+      <p:sp>
+        <p:nvSpPr>
+          <p:cNvPr id="27" name="Rectangle 26"/>
+          <p:cNvSpPr/>
+          <p:nvPr/>
+        </p:nvSpPr>
+        <p:spPr>
+          <a:xfrm>
+            <a:off x="7970676" y="1335024"/>
+            <a:ext cx="3306767" cy="4645152"/>
           </a:xfrm>
           <a:prstGeom prst="rect">
             <a:avLst/>
@@ -9927,7 +10151,7 @@
       </p:sp>
       <p:pic>
         <p:nvPicPr>
-          <p:cNvPr id="22" name="Picture 21" descr="10_sprint_results.png"/>
+          <p:cNvPr id="28" name="Picture 27" descr="10_sprint_results.png"/>
           <p:cNvPicPr>
             <a:picLocks noChangeAspect="1"/>
           </p:cNvPicPr>
@@ -9941,8 +10165,8 @@
         </p:blipFill>
         <p:spPr>
           <a:xfrm>
-            <a:off x="7958748" y="1280160"/>
-            <a:ext cx="3330623" cy="4709160"/>
+            <a:off x="8007252" y="1371600"/>
+            <a:ext cx="3233615" cy="4572000"/>
           </a:xfrm>
           <a:prstGeom prst="rect">
             <a:avLst/>
@@ -9951,13 +10175,13 @@
       </p:pic>
       <p:sp>
         <p:nvSpPr>
-          <p:cNvPr id="23" name="TextBox 22"/>
+          <p:cNvPr id="29" name="TextBox 28"/>
           <p:cNvSpPr txBox="1"/>
           <p:nvPr/>
         </p:nvSpPr>
         <p:spPr>
           <a:xfrm>
-            <a:off x="7543800" y="6044184"/>
+            <a:off x="7543800" y="5998464"/>
             <a:ext cx="4160520" cy="411480"/>
           </a:xfrm>
           <a:prstGeom prst="rect">
@@ -9979,40 +10203,6 @@
                 </a:solidFill>
               </a:rPr>
               <a:t>Source: TM Forum, Sprint case study</a:t>
-            </a:r>
-          </a:p>
-        </p:txBody>
-      </p:sp>
-      <p:sp>
-        <p:nvSpPr>
-          <p:cNvPr id="24" name="TextBox 23"/>
-          <p:cNvSpPr txBox="1"/>
-          <p:nvPr/>
-        </p:nvSpPr>
-        <p:spPr>
-          <a:xfrm>
-            <a:off x="502920" y="5120640"/>
-            <a:ext cx="6858000" cy="1005840"/>
-          </a:xfrm>
-          <a:prstGeom prst="rect">
-            <a:avLst/>
-          </a:prstGeom>
-          <a:noFill/>
-        </p:spPr>
-        <p:txBody>
-          <a:bodyPr wrap="square" anchor="t" lIns="73152" rIns="73152" tIns="36576" bIns="36576">
-            <a:spAutoFit/>
-          </a:bodyPr>
-          <a:lstStyle/>
-          <a:p>
-            <a:pPr algn="l"/>
-            <a:r>
-              <a:rPr sz="1300" b="0">
-                <a:solidFill>
-                  <a:srgbClr val="5F5A6B"/>
-                </a:solidFill>
-              </a:rPr>
-              <a:t>Mtel (A1 Bulgaria), earlier Amdocs Master Enterprise Catalog: &gt;80% faster TTM; complex offers idea-to-production in under three days (CTO quote).</a:t>
             </a:r>
           </a:p>
         </p:txBody>
@@ -10142,7 +10332,7 @@
                   <a:srgbClr val="5F5A6B"/>
                 </a:solidFill>
               </a:rPr>
-              <a:t>PLC study  |  Amdocs CatalogONE: from idea to Dynamics 365</a:t>
+              <a:t>PLC study  |  Amdocs CatalogONE: from idea to CRM</a:t>
             </a:r>
           </a:p>
         </p:txBody>
@@ -10210,7 +10400,7 @@
               <a:buChar char="•"/>
             </a:pPr>
             <a:r>
-              <a:rPr b="1" sz="1600">
+              <a:rPr b="1" sz="1500">
                 <a:solidFill>
                   <a:srgbClr val="0C294B"/>
                 </a:solidFill>
@@ -10218,7 +10408,7 @@
               <a:t>Idea to Active </a:t>
             </a:r>
             <a:r>
-              <a:rPr sz="1600">
+              <a:rPr sz="1500">
                 <a:solidFill>
                   <a:srgbClr val="26222E"/>
                 </a:solidFill>
@@ -10234,20 +10424,20 @@
               <a:buChar char="•"/>
             </a:pPr>
             <a:r>
-              <a:rPr b="1" sz="1600">
+              <a:rPr b="1" sz="1500">
                 <a:solidFill>
                   <a:srgbClr val="0C294B"/>
                 </a:solidFill>
               </a:rPr>
-              <a:t>Active to Dynamics 365 </a:t>
-            </a:r>
-            <a:r>
-              <a:rPr sz="1600">
+              <a:t>CatalogONE publishes </a:t>
+            </a:r>
+            <a:r>
+              <a:rPr sz="1500">
                 <a:solidFill>
                   <a:srgbClr val="26222E"/>
                 </a:solidFill>
               </a:rPr>
-              <a:t>through Centralized publish, Kafka and TMF620. The catalog stays the single source of truth.</a:t>
+              <a:t>to consuming applications and "the customer's CRM" via Centralized, Kafka and TMF620.</a:t>
             </a:r>
           </a:p>
           <a:p>
@@ -10258,20 +10448,20 @@
               <a:buChar char="•"/>
             </a:pPr>
             <a:r>
-              <a:rPr b="1" sz="1600">
+              <a:rPr b="1" sz="1500">
                 <a:solidFill>
                   <a:srgbClr val="0C294B"/>
                 </a:solidFill>
               </a:rPr>
-              <a:t>CRM is not replaced. </a:t>
-            </a:r>
-            <a:r>
-              <a:rPr sz="1600">
+              <a:t>Dynamics 365 is named on CEP, </a:t>
+            </a:r>
+            <a:r>
+              <a:rPr sz="1500">
                 <a:solidFill>
                   <a:srgbClr val="26222E"/>
                 </a:solidFill>
               </a:rPr>
-              <a:t>Sales, quotes and orders stay in Dynamics.</a:t>
+              <a:t>as Sales and Customer Service next to Catalog — not on the CatalogONE datasheet as a connector. PLDT is live on CEP care.</a:t>
             </a:r>
           </a:p>
           <a:p>
@@ -10282,20 +10472,20 @@
               <a:buChar char="•"/>
             </a:pPr>
             <a:r>
-              <a:rPr b="1" sz="1600">
+              <a:rPr b="1" sz="1500">
                 <a:solidFill>
                   <a:srgbClr val="0C294B"/>
                 </a:solidFill>
               </a:rPr>
-              <a:t>Rules and prices </a:t>
-            </a:r>
-            <a:r>
-              <a:rPr sz="1600">
+              <a:t>Two paths: </a:t>
+            </a:r>
+            <a:r>
+              <a:rPr sz="1500">
                 <a:solidFill>
                   <a:srgbClr val="26222E"/>
                 </a:solidFill>
               </a:rPr>
-              <a:t>are enforced from the catalog, not re-typed.</a:t>
+              <a:t>buy CEP, or keep Dynamics and integrate via TMF620. CRM is not replaced.</a:t>
             </a:r>
           </a:p>
           <a:p>
@@ -10306,7 +10496,7 @@
               <a:buChar char="•"/>
             </a:pPr>
             <a:r>
-              <a:rPr b="1" sz="1600">
+              <a:rPr b="1" sz="1500">
                 <a:solidFill>
                   <a:srgbClr val="0C294B"/>
                 </a:solidFill>
@@ -10314,7 +10504,7 @@
               <a:t>Changes are versioned, </a:t>
             </a:r>
             <a:r>
-              <a:rPr sz="1600">
+              <a:rPr sz="1500">
                 <a:solidFill>
                   <a:srgbClr val="26222E"/>
                 </a:solidFill>
@@ -10330,20 +10520,20 @@
               <a:buChar char="•"/>
             </a:pPr>
             <a:r>
-              <a:rPr b="1" sz="1600">
+              <a:rPr b="1" sz="1500">
                 <a:solidFill>
                   <a:srgbClr val="0C294B"/>
                 </a:solidFill>
               </a:rPr>
-              <a:t>Proven </a:t>
-            </a:r>
-            <a:r>
-              <a:rPr sz="1600">
+              <a:t>Proven CatalogONE </a:t>
+            </a:r>
+            <a:r>
+              <a:rPr sz="1500">
                 <a:solidFill>
                   <a:srgbClr val="26222E"/>
                 </a:solidFill>
               </a:rPr>
-              <a:t>at a European quad-play, Sprint / T-Mobile and KT.</a:t>
+              <a:t>at a European quad-play, Sprint / T-Mobile and KT. CEP + Dynamics 365 is live at PLDT for case management.</a:t>
             </a:r>
           </a:p>
         </p:txBody>
@@ -10549,7 +10739,7 @@
                   <a:srgbClr val="26222E"/>
                 </a:solidFill>
               </a:rPr>
-              <a:t>7. TM Forum Sprint / T-Mobile case study</a:t>
+              <a:t>7. IDC PLDT case study (CEP Unified Case Management, 2026)</a:t>
             </a:r>
           </a:p>
           <a:p>
@@ -10564,7 +10754,7 @@
                   <a:srgbClr val="26222E"/>
                 </a:solidFill>
               </a:rPr>
-              <a:t>8. Amdocs KT CatalogONE press release (Nov 2020)</a:t>
+              <a:t>8. TM Forum Sprint / T-Mobile case study</a:t>
             </a:r>
           </a:p>
           <a:p>
@@ -10579,7 +10769,7 @@
                   <a:srgbClr val="26222E"/>
                 </a:solidFill>
               </a:rPr>
-              <a:t>9. TM Forum Open API conformance (Amdocs TMF620)</a:t>
+              <a:t>9. Amdocs KT CatalogONE press release (Nov 2020)</a:t>
             </a:r>
           </a:p>
           <a:p>
@@ -10594,7 +10784,22 @@
                   <a:srgbClr val="26222E"/>
                 </a:solidFill>
               </a:rPr>
-              <a:t>10. Microsoft Learn: Dynamics 365 product catalog</a:t>
+              <a:t>10. TM Forum Open API conformance (Amdocs TMF620)</a:t>
+            </a:r>
+          </a:p>
+          <a:p>
+            <a:pPr algn="l">
+              <a:spcAft>
+                <a:spcPts val="660"/>
+              </a:spcAft>
+            </a:pPr>
+            <a:r>
+              <a:rPr sz="1200" b="0">
+                <a:solidFill>
+                  <a:srgbClr val="26222E"/>
+                </a:solidFill>
+              </a:rPr>
+              <a:t>11. Microsoft Learn: Dynamics 365 product catalog</a:t>
             </a:r>
           </a:p>
         </p:txBody>
@@ -10724,7 +10929,7 @@
                   <a:srgbClr val="5F5A6B"/>
                 </a:solidFill>
               </a:rPr>
-              <a:t>PLC study  |  Amdocs CatalogONE: from idea to Dynamics 365</a:t>
+              <a:t>PLC study  |  Amdocs CatalogONE: from idea to CRM</a:t>
             </a:r>
           </a:p>
         </p:txBody>
@@ -10904,7 +11109,7 @@
                   <a:srgbClr val="5F5A6B"/>
                 </a:solidFill>
               </a:rPr>
-              <a:t>Catalog only; CRM stays Dynamics</a:t>
+              <a:t>Catalog only; CRM is not replaced</a:t>
             </a:r>
           </a:p>
         </p:txBody>
@@ -11454,7 +11659,7 @@
                   <a:srgbClr val="26222E"/>
                 </a:solidFill>
               </a:rPr>
-              <a:t>Publish to Dynamics 365</a:t>
+              <a:t>How catalog reaches CRM</a:t>
             </a:r>
           </a:p>
         </p:txBody>
@@ -11488,7 +11693,7 @@
                   <a:srgbClr val="5F5A6B"/>
                 </a:solidFill>
               </a:rPr>
-              <a:t>How the product reaches the salesperson</a:t>
+              <a:t>CatalogONE vs CEP vs Dynamics</a:t>
             </a:r>
           </a:p>
         </p:txBody>
@@ -11730,7 +11935,7 @@
                   <a:srgbClr val="0C294B"/>
                 </a:solidFill>
               </a:rPr>
-              <a:t>Why this PLC: catalog only, CRM stays Dynamics</a:t>
+              <a:t>Why this PLC: catalog only. CRM is not replaced.</a:t>
             </a:r>
           </a:p>
         </p:txBody>
@@ -11743,8 +11948,8 @@
         </p:nvSpPr>
         <p:spPr>
           <a:xfrm>
-            <a:off x="548640" y="6446520"/>
-            <a:ext cx="8686800" cy="274320"/>
+            <a:off x="548640" y="914400"/>
+            <a:ext cx="10972800" cy="411480"/>
           </a:xfrm>
           <a:prstGeom prst="rect">
             <a:avLst/>
@@ -11759,12 +11964,12 @@
           <a:p>
             <a:pPr algn="l"/>
             <a:r>
-              <a:rPr sz="1000" b="0">
+              <a:rPr sz="1500" b="0">
                 <a:solidFill>
                   <a:srgbClr val="5F5A6B"/>
                 </a:solidFill>
               </a:rPr>
-              <a:t>PLC study  |  Amdocs CatalogONE: from idea to Dynamics 365</a:t>
+              <a:t>Two facts, kept separate: CatalogONE publishes to CRM. CEP names Dynamics 365.</a:t>
             </a:r>
           </a:p>
         </p:txBody>
@@ -11777,8 +11982,8 @@
         </p:nvSpPr>
         <p:spPr>
           <a:xfrm>
-            <a:off x="10698480" y="6446520"/>
-            <a:ext cx="914400" cy="274320"/>
+            <a:off x="548640" y="6446520"/>
+            <a:ext cx="8686800" cy="274320"/>
           </a:xfrm>
           <a:prstGeom prst="rect">
             <a:avLst/>
@@ -11791,6 +11996,40 @@
           </a:bodyPr>
           <a:lstStyle/>
           <a:p>
+            <a:pPr algn="l"/>
+            <a:r>
+              <a:rPr sz="1000" b="0">
+                <a:solidFill>
+                  <a:srgbClr val="5F5A6B"/>
+                </a:solidFill>
+              </a:rPr>
+              <a:t>PLC study  |  Amdocs CatalogONE: from idea to CRM</a:t>
+            </a:r>
+          </a:p>
+        </p:txBody>
+      </p:sp>
+      <p:sp>
+        <p:nvSpPr>
+          <p:cNvPr id="6" name="TextBox 5"/>
+          <p:cNvSpPr txBox="1"/>
+          <p:nvPr/>
+        </p:nvSpPr>
+        <p:spPr>
+          <a:xfrm>
+            <a:off x="10698480" y="6446520"/>
+            <a:ext cx="914400" cy="274320"/>
+          </a:xfrm>
+          <a:prstGeom prst="rect">
+            <a:avLst/>
+          </a:prstGeom>
+          <a:noFill/>
+        </p:spPr>
+        <p:txBody>
+          <a:bodyPr wrap="square" anchor="t" lIns="73152" rIns="73152" tIns="36576" bIns="36576">
+            <a:spAutoFit/>
+          </a:bodyPr>
+          <a:lstStyle/>
+          <a:p>
             <a:pPr algn="r"/>
             <a:r>
               <a:rPr sz="1000" b="0">
@@ -11805,14 +12044,14 @@
       </p:sp>
       <p:sp>
         <p:nvSpPr>
-          <p:cNvPr id="6" name="Rectangle 5"/>
+          <p:cNvPr id="7" name="Rectangle 6"/>
           <p:cNvSpPr/>
           <p:nvPr/>
         </p:nvSpPr>
         <p:spPr>
           <a:xfrm>
-            <a:off x="548640" y="1371600"/>
-            <a:ext cx="3474720" cy="2194560"/>
+            <a:off x="548640" y="1463040"/>
+            <a:ext cx="3474720" cy="2103120"/>
           </a:xfrm>
           <a:prstGeom prst="rect">
             <a:avLst/>
@@ -11849,13 +12088,637 @@
       </p:sp>
       <p:sp>
         <p:nvSpPr>
-          <p:cNvPr id="7" name="Rectangle 6"/>
+          <p:cNvPr id="8" name="Rectangle 7"/>
           <p:cNvSpPr/>
           <p:nvPr/>
         </p:nvSpPr>
         <p:spPr>
           <a:xfrm>
-            <a:off x="548640" y="1371600"/>
+            <a:off x="548640" y="1463040"/>
+            <a:ext cx="3474720" cy="91440"/>
+          </a:xfrm>
+          <a:prstGeom prst="rect">
+            <a:avLst/>
+          </a:prstGeom>
+          <a:solidFill>
+            <a:srgbClr val="0C294B"/>
+          </a:solidFill>
+          <a:ln>
+            <a:noFill/>
+          </a:ln>
+          <a:effectLst/>
+        </p:spPr>
+        <p:style>
+          <a:lnRef idx="1">
+            <a:schemeClr val="accent1"/>
+          </a:lnRef>
+          <a:fillRef idx="3">
+            <a:schemeClr val="accent1"/>
+          </a:fillRef>
+          <a:effectRef idx="2">
+            <a:schemeClr val="accent1"/>
+          </a:effectRef>
+          <a:fontRef idx="minor">
+            <a:schemeClr val="lt1"/>
+          </a:fontRef>
+        </p:style>
+        <p:txBody>
+          <a:bodyPr rtlCol="0" anchor="ctr"/>
+          <a:lstStyle/>
+          <a:p>
+            <a:pPr algn="ctr"/>
+          </a:p>
+        </p:txBody>
+      </p:sp>
+      <p:sp>
+        <p:nvSpPr>
+          <p:cNvPr id="9" name="TextBox 8"/>
+          <p:cNvSpPr txBox="1"/>
+          <p:nvPr/>
+        </p:nvSpPr>
+        <p:spPr>
+          <a:xfrm>
+            <a:off x="685800" y="1691640"/>
+            <a:ext cx="3200400" cy="457200"/>
+          </a:xfrm>
+          <a:prstGeom prst="rect">
+            <a:avLst/>
+          </a:prstGeom>
+          <a:noFill/>
+        </p:spPr>
+        <p:txBody>
+          <a:bodyPr wrap="square" anchor="t" lIns="73152" rIns="73152" tIns="36576" bIns="36576">
+            <a:spAutoFit/>
+          </a:bodyPr>
+          <a:lstStyle/>
+          <a:p>
+            <a:pPr algn="l"/>
+            <a:r>
+              <a:rPr sz="1700" b="1">
+                <a:solidFill>
+                  <a:srgbClr val="0C294B"/>
+                </a:solidFill>
+              </a:rPr>
+              <a:t>Catalog, not CRM</a:t>
+            </a:r>
+          </a:p>
+        </p:txBody>
+      </p:sp>
+      <p:sp>
+        <p:nvSpPr>
+          <p:cNvPr id="10" name="TextBox 9"/>
+          <p:cNvSpPr txBox="1"/>
+          <p:nvPr/>
+        </p:nvSpPr>
+        <p:spPr>
+          <a:xfrm>
+            <a:off x="685800" y="2194560"/>
+            <a:ext cx="3200400" cy="1234440"/>
+          </a:xfrm>
+          <a:prstGeom prst="rect">
+            <a:avLst/>
+          </a:prstGeom>
+          <a:noFill/>
+        </p:spPr>
+        <p:txBody>
+          <a:bodyPr wrap="square" anchor="t" lIns="73152" rIns="73152" tIns="36576" bIns="36576">
+            <a:spAutoFit/>
+          </a:bodyPr>
+          <a:lstStyle/>
+          <a:p>
+            <a:pPr algn="l"/>
+            <a:r>
+              <a:rPr sz="1300" b="0">
+                <a:solidFill>
+                  <a:srgbClr val="26222E"/>
+                </a:solidFill>
+              </a:rPr>
+              <a:t>CatalogONE owns products, prices, rules and approvals. It publishes to consuming apps and "the customer's CRM".</a:t>
+            </a:r>
+          </a:p>
+        </p:txBody>
+      </p:sp>
+      <p:sp>
+        <p:nvSpPr>
+          <p:cNvPr id="11" name="Rectangle 10"/>
+          <p:cNvSpPr/>
+          <p:nvPr/>
+        </p:nvSpPr>
+        <p:spPr>
+          <a:xfrm>
+            <a:off x="4297679" y="1463040"/>
+            <a:ext cx="3474720" cy="2103120"/>
+          </a:xfrm>
+          <a:prstGeom prst="rect">
+            <a:avLst/>
+          </a:prstGeom>
+          <a:solidFill>
+            <a:srgbClr val="E8F0F8"/>
+          </a:solidFill>
+          <a:ln>
+            <a:noFill/>
+          </a:ln>
+          <a:effectLst/>
+        </p:spPr>
+        <p:style>
+          <a:lnRef idx="1">
+            <a:schemeClr val="accent1"/>
+          </a:lnRef>
+          <a:fillRef idx="3">
+            <a:schemeClr val="accent1"/>
+          </a:fillRef>
+          <a:effectRef idx="2">
+            <a:schemeClr val="accent1"/>
+          </a:effectRef>
+          <a:fontRef idx="minor">
+            <a:schemeClr val="lt1"/>
+          </a:fontRef>
+        </p:style>
+        <p:txBody>
+          <a:bodyPr rtlCol="0" anchor="ctr"/>
+          <a:lstStyle/>
+          <a:p>
+            <a:pPr algn="ctr"/>
+          </a:p>
+        </p:txBody>
+      </p:sp>
+      <p:sp>
+        <p:nvSpPr>
+          <p:cNvPr id="12" name="Rectangle 11"/>
+          <p:cNvSpPr/>
+          <p:nvPr/>
+        </p:nvSpPr>
+        <p:spPr>
+          <a:xfrm>
+            <a:off x="4297679" y="1463040"/>
+            <a:ext cx="3474720" cy="91440"/>
+          </a:xfrm>
+          <a:prstGeom prst="rect">
+            <a:avLst/>
+          </a:prstGeom>
+          <a:solidFill>
+            <a:srgbClr val="0C294B"/>
+          </a:solidFill>
+          <a:ln>
+            <a:noFill/>
+          </a:ln>
+          <a:effectLst/>
+        </p:spPr>
+        <p:style>
+          <a:lnRef idx="1">
+            <a:schemeClr val="accent1"/>
+          </a:lnRef>
+          <a:fillRef idx="3">
+            <a:schemeClr val="accent1"/>
+          </a:fillRef>
+          <a:effectRef idx="2">
+            <a:schemeClr val="accent1"/>
+          </a:effectRef>
+          <a:fontRef idx="minor">
+            <a:schemeClr val="lt1"/>
+          </a:fontRef>
+        </p:style>
+        <p:txBody>
+          <a:bodyPr rtlCol="0" anchor="ctr"/>
+          <a:lstStyle/>
+          <a:p>
+            <a:pPr algn="ctr"/>
+          </a:p>
+        </p:txBody>
+      </p:sp>
+      <p:sp>
+        <p:nvSpPr>
+          <p:cNvPr id="13" name="TextBox 12"/>
+          <p:cNvSpPr txBox="1"/>
+          <p:nvPr/>
+        </p:nvSpPr>
+        <p:spPr>
+          <a:xfrm>
+            <a:off x="4434839" y="1691640"/>
+            <a:ext cx="3200400" cy="457200"/>
+          </a:xfrm>
+          <a:prstGeom prst="rect">
+            <a:avLst/>
+          </a:prstGeom>
+          <a:noFill/>
+        </p:spPr>
+        <p:txBody>
+          <a:bodyPr wrap="square" anchor="t" lIns="73152" rIns="73152" tIns="36576" bIns="36576">
+            <a:spAutoFit/>
+          </a:bodyPr>
+          <a:lstStyle/>
+          <a:p>
+            <a:pPr algn="l"/>
+            <a:r>
+              <a:rPr sz="1700" b="1">
+                <a:solidFill>
+                  <a:srgbClr val="0C294B"/>
+                </a:solidFill>
+              </a:rPr>
+              <a:t>One source of truth</a:t>
+            </a:r>
+          </a:p>
+        </p:txBody>
+      </p:sp>
+      <p:sp>
+        <p:nvSpPr>
+          <p:cNvPr id="14" name="TextBox 13"/>
+          <p:cNvSpPr txBox="1"/>
+          <p:nvPr/>
+        </p:nvSpPr>
+        <p:spPr>
+          <a:xfrm>
+            <a:off x="4434839" y="2194560"/>
+            <a:ext cx="3200400" cy="1234440"/>
+          </a:xfrm>
+          <a:prstGeom prst="rect">
+            <a:avLst/>
+          </a:prstGeom>
+          <a:noFill/>
+        </p:spPr>
+        <p:txBody>
+          <a:bodyPr wrap="square" anchor="t" lIns="73152" rIns="73152" tIns="36576" bIns="36576">
+            <a:spAutoFit/>
+          </a:bodyPr>
+          <a:lstStyle/>
+          <a:p>
+            <a:pPr algn="l"/>
+            <a:r>
+              <a:rPr sz="1300" b="0">
+                <a:solidFill>
+                  <a:srgbClr val="26222E"/>
+                </a:solidFill>
+              </a:rPr>
+              <a:t>Commercial and technical definitions live once. CRM, ordering and billing consume them.</a:t>
+            </a:r>
+          </a:p>
+        </p:txBody>
+      </p:sp>
+      <p:sp>
+        <p:nvSpPr>
+          <p:cNvPr id="15" name="Rectangle 14"/>
+          <p:cNvSpPr/>
+          <p:nvPr/>
+        </p:nvSpPr>
+        <p:spPr>
+          <a:xfrm>
+            <a:off x="8046719" y="1463040"/>
+            <a:ext cx="3474720" cy="2103120"/>
+          </a:xfrm>
+          <a:prstGeom prst="rect">
+            <a:avLst/>
+          </a:prstGeom>
+          <a:solidFill>
+            <a:srgbClr val="E8F0F8"/>
+          </a:solidFill>
+          <a:ln>
+            <a:noFill/>
+          </a:ln>
+          <a:effectLst/>
+        </p:spPr>
+        <p:style>
+          <a:lnRef idx="1">
+            <a:schemeClr val="accent1"/>
+          </a:lnRef>
+          <a:fillRef idx="3">
+            <a:schemeClr val="accent1"/>
+          </a:fillRef>
+          <a:effectRef idx="2">
+            <a:schemeClr val="accent1"/>
+          </a:effectRef>
+          <a:fontRef idx="minor">
+            <a:schemeClr val="lt1"/>
+          </a:fontRef>
+        </p:style>
+        <p:txBody>
+          <a:bodyPr rtlCol="0" anchor="ctr"/>
+          <a:lstStyle/>
+          <a:p>
+            <a:pPr algn="ctr"/>
+          </a:p>
+        </p:txBody>
+      </p:sp>
+      <p:sp>
+        <p:nvSpPr>
+          <p:cNvPr id="16" name="Rectangle 15"/>
+          <p:cNvSpPr/>
+          <p:nvPr/>
+        </p:nvSpPr>
+        <p:spPr>
+          <a:xfrm>
+            <a:off x="8046719" y="1463040"/>
+            <a:ext cx="3474720" cy="91440"/>
+          </a:xfrm>
+          <a:prstGeom prst="rect">
+            <a:avLst/>
+          </a:prstGeom>
+          <a:solidFill>
+            <a:srgbClr val="0C294B"/>
+          </a:solidFill>
+          <a:ln>
+            <a:noFill/>
+          </a:ln>
+          <a:effectLst/>
+        </p:spPr>
+        <p:style>
+          <a:lnRef idx="1">
+            <a:schemeClr val="accent1"/>
+          </a:lnRef>
+          <a:fillRef idx="3">
+            <a:schemeClr val="accent1"/>
+          </a:fillRef>
+          <a:effectRef idx="2">
+            <a:schemeClr val="accent1"/>
+          </a:effectRef>
+          <a:fontRef idx="minor">
+            <a:schemeClr val="lt1"/>
+          </a:fontRef>
+        </p:style>
+        <p:txBody>
+          <a:bodyPr rtlCol="0" anchor="ctr"/>
+          <a:lstStyle/>
+          <a:p>
+            <a:pPr algn="ctr"/>
+          </a:p>
+        </p:txBody>
+      </p:sp>
+      <p:sp>
+        <p:nvSpPr>
+          <p:cNvPr id="17" name="TextBox 16"/>
+          <p:cNvSpPr txBox="1"/>
+          <p:nvPr/>
+        </p:nvSpPr>
+        <p:spPr>
+          <a:xfrm>
+            <a:off x="8183879" y="1691640"/>
+            <a:ext cx="3200400" cy="457200"/>
+          </a:xfrm>
+          <a:prstGeom prst="rect">
+            <a:avLst/>
+          </a:prstGeom>
+          <a:noFill/>
+        </p:spPr>
+        <p:txBody>
+          <a:bodyPr wrap="square" anchor="t" lIns="73152" rIns="73152" tIns="36576" bIns="36576">
+            <a:spAutoFit/>
+          </a:bodyPr>
+          <a:lstStyle/>
+          <a:p>
+            <a:pPr algn="l"/>
+            <a:r>
+              <a:rPr sz="1700" b="1">
+                <a:solidFill>
+                  <a:srgbClr val="0C294B"/>
+                </a:solidFill>
+              </a:rPr>
+              <a:t>A governed journey</a:t>
+            </a:r>
+          </a:p>
+        </p:txBody>
+      </p:sp>
+      <p:sp>
+        <p:nvSpPr>
+          <p:cNvPr id="18" name="TextBox 17"/>
+          <p:cNvSpPr txBox="1"/>
+          <p:nvPr/>
+        </p:nvSpPr>
+        <p:spPr>
+          <a:xfrm>
+            <a:off x="8183879" y="2194560"/>
+            <a:ext cx="3200400" cy="1234440"/>
+          </a:xfrm>
+          <a:prstGeom prst="rect">
+            <a:avLst/>
+          </a:prstGeom>
+          <a:noFill/>
+        </p:spPr>
+        <p:txBody>
+          <a:bodyPr wrap="square" anchor="t" lIns="73152" rIns="73152" tIns="36576" bIns="36576">
+            <a:spAutoFit/>
+          </a:bodyPr>
+          <a:lstStyle/>
+          <a:p>
+            <a:pPr algn="l"/>
+            <a:r>
+              <a:rPr sz="1300" b="0">
+                <a:solidFill>
+                  <a:srgbClr val="26222E"/>
+                </a:solidFill>
+              </a:rPr>
+              <a:t>Ideation to end-of-life, with workflow, approvals, simulations and versioned change.</a:t>
+            </a:r>
+          </a:p>
+        </p:txBody>
+      </p:sp>
+      <p:sp>
+        <p:nvSpPr>
+          <p:cNvPr id="19" name="Rectangle 18"/>
+          <p:cNvSpPr/>
+          <p:nvPr/>
+        </p:nvSpPr>
+        <p:spPr>
+          <a:xfrm>
+            <a:off x="548640" y="3794760"/>
+            <a:ext cx="3474720" cy="2103120"/>
+          </a:xfrm>
+          <a:prstGeom prst="rect">
+            <a:avLst/>
+          </a:prstGeom>
+          <a:solidFill>
+            <a:srgbClr val="E8F0F8"/>
+          </a:solidFill>
+          <a:ln>
+            <a:noFill/>
+          </a:ln>
+          <a:effectLst/>
+        </p:spPr>
+        <p:style>
+          <a:lnRef idx="1">
+            <a:schemeClr val="accent1"/>
+          </a:lnRef>
+          <a:fillRef idx="3">
+            <a:schemeClr val="accent1"/>
+          </a:fillRef>
+          <a:effectRef idx="2">
+            <a:schemeClr val="accent1"/>
+          </a:effectRef>
+          <a:fontRef idx="minor">
+            <a:schemeClr val="lt1"/>
+          </a:fontRef>
+        </p:style>
+        <p:txBody>
+          <a:bodyPr rtlCol="0" anchor="ctr"/>
+          <a:lstStyle/>
+          <a:p>
+            <a:pPr algn="ctr"/>
+          </a:p>
+        </p:txBody>
+      </p:sp>
+      <p:sp>
+        <p:nvSpPr>
+          <p:cNvPr id="20" name="Rectangle 19"/>
+          <p:cNvSpPr/>
+          <p:nvPr/>
+        </p:nvSpPr>
+        <p:spPr>
+          <a:xfrm>
+            <a:off x="548640" y="3794760"/>
+            <a:ext cx="3474720" cy="91440"/>
+          </a:xfrm>
+          <a:prstGeom prst="rect">
+            <a:avLst/>
+          </a:prstGeom>
+          <a:solidFill>
+            <a:srgbClr val="0C294B"/>
+          </a:solidFill>
+          <a:ln>
+            <a:noFill/>
+          </a:ln>
+          <a:effectLst/>
+        </p:spPr>
+        <p:style>
+          <a:lnRef idx="1">
+            <a:schemeClr val="accent1"/>
+          </a:lnRef>
+          <a:fillRef idx="3">
+            <a:schemeClr val="accent1"/>
+          </a:fillRef>
+          <a:effectRef idx="2">
+            <a:schemeClr val="accent1"/>
+          </a:effectRef>
+          <a:fontRef idx="minor">
+            <a:schemeClr val="lt1"/>
+          </a:fontRef>
+        </p:style>
+        <p:txBody>
+          <a:bodyPr rtlCol="0" anchor="ctr"/>
+          <a:lstStyle/>
+          <a:p>
+            <a:pPr algn="ctr"/>
+          </a:p>
+        </p:txBody>
+      </p:sp>
+      <p:sp>
+        <p:nvSpPr>
+          <p:cNvPr id="21" name="TextBox 20"/>
+          <p:cNvSpPr txBox="1"/>
+          <p:nvPr/>
+        </p:nvSpPr>
+        <p:spPr>
+          <a:xfrm>
+            <a:off x="685800" y="4023360"/>
+            <a:ext cx="3200400" cy="457200"/>
+          </a:xfrm>
+          <a:prstGeom prst="rect">
+            <a:avLst/>
+          </a:prstGeom>
+          <a:noFill/>
+        </p:spPr>
+        <p:txBody>
+          <a:bodyPr wrap="square" anchor="t" lIns="73152" rIns="73152" tIns="36576" bIns="36576">
+            <a:spAutoFit/>
+          </a:bodyPr>
+          <a:lstStyle/>
+          <a:p>
+            <a:pPr algn="l"/>
+            <a:r>
+              <a:rPr sz="1700" b="1">
+                <a:solidFill>
+                  <a:srgbClr val="0C294B"/>
+                </a:solidFill>
+              </a:rPr>
+              <a:t>Business users configure</a:t>
+            </a:r>
+          </a:p>
+        </p:txBody>
+      </p:sp>
+      <p:sp>
+        <p:nvSpPr>
+          <p:cNvPr id="22" name="TextBox 21"/>
+          <p:cNvSpPr txBox="1"/>
+          <p:nvPr/>
+        </p:nvSpPr>
+        <p:spPr>
+          <a:xfrm>
+            <a:off x="685800" y="4526280"/>
+            <a:ext cx="3200400" cy="1234440"/>
+          </a:xfrm>
+          <a:prstGeom prst="rect">
+            <a:avLst/>
+          </a:prstGeom>
+          <a:noFill/>
+        </p:spPr>
+        <p:txBody>
+          <a:bodyPr wrap="square" anchor="t" lIns="73152" rIns="73152" tIns="36576" bIns="36576">
+            <a:spAutoFit/>
+          </a:bodyPr>
+          <a:lstStyle/>
+          <a:p>
+            <a:pPr algn="l"/>
+            <a:r>
+              <a:rPr sz="1300" b="0">
+                <a:solidFill>
+                  <a:srgbClr val="26222E"/>
+                </a:solidFill>
+              </a:rPr>
+              <a:t>Role-based UI, templates and building blocks. No code. No deployment overhead.</a:t>
+            </a:r>
+          </a:p>
+        </p:txBody>
+      </p:sp>
+      <p:sp>
+        <p:nvSpPr>
+          <p:cNvPr id="23" name="Rectangle 22"/>
+          <p:cNvSpPr/>
+          <p:nvPr/>
+        </p:nvSpPr>
+        <p:spPr>
+          <a:xfrm>
+            <a:off x="4297679" y="3794760"/>
+            <a:ext cx="3474720" cy="2103120"/>
+          </a:xfrm>
+          <a:prstGeom prst="rect">
+            <a:avLst/>
+          </a:prstGeom>
+          <a:solidFill>
+            <a:srgbClr val="E8F0F8"/>
+          </a:solidFill>
+          <a:ln>
+            <a:noFill/>
+          </a:ln>
+          <a:effectLst/>
+        </p:spPr>
+        <p:style>
+          <a:lnRef idx="1">
+            <a:schemeClr val="accent1"/>
+          </a:lnRef>
+          <a:fillRef idx="3">
+            <a:schemeClr val="accent1"/>
+          </a:fillRef>
+          <a:effectRef idx="2">
+            <a:schemeClr val="accent1"/>
+          </a:effectRef>
+          <a:fontRef idx="minor">
+            <a:schemeClr val="lt1"/>
+          </a:fontRef>
+        </p:style>
+        <p:txBody>
+          <a:bodyPr rtlCol="0" anchor="ctr"/>
+          <a:lstStyle/>
+          <a:p>
+            <a:pPr algn="ctr"/>
+          </a:p>
+        </p:txBody>
+      </p:sp>
+      <p:sp>
+        <p:nvSpPr>
+          <p:cNvPr id="24" name="Rectangle 23"/>
+          <p:cNvSpPr/>
+          <p:nvPr/>
+        </p:nvSpPr>
+        <p:spPr>
+          <a:xfrm>
+            <a:off x="4297679" y="3794760"/>
             <a:ext cx="3474720" cy="91440"/>
           </a:xfrm>
           <a:prstGeom prst="rect">
@@ -11893,14 +12756,14 @@
       </p:sp>
       <p:sp>
         <p:nvSpPr>
-          <p:cNvPr id="8" name="TextBox 7"/>
+          <p:cNvPr id="25" name="TextBox 24"/>
           <p:cNvSpPr txBox="1"/>
           <p:nvPr/>
         </p:nvSpPr>
         <p:spPr>
           <a:xfrm>
-            <a:off x="685800" y="1645920"/>
-            <a:ext cx="3200400" cy="502920"/>
+            <a:off x="4434839" y="4023360"/>
+            <a:ext cx="3200400" cy="457200"/>
           </a:xfrm>
           <a:prstGeom prst="rect">
             <a:avLst/>
@@ -11915,25 +12778,25 @@
           <a:p>
             <a:pPr algn="l"/>
             <a:r>
-              <a:rPr sz="1800" b="1">
+              <a:rPr sz="1700" b="1">
                 <a:solidFill>
                   <a:srgbClr val="0C294B"/>
                 </a:solidFill>
               </a:rPr>
-              <a:t>Catalog, not CRM</a:t>
-            </a:r>
-          </a:p>
-        </p:txBody>
-      </p:sp>
-      <p:sp>
-        <p:nvSpPr>
-          <p:cNvPr id="9" name="TextBox 8"/>
+              <a:t>Publish, do not re-key</a:t>
+            </a:r>
+          </a:p>
+        </p:txBody>
+      </p:sp>
+      <p:sp>
+        <p:nvSpPr>
+          <p:cNvPr id="26" name="TextBox 25"/>
           <p:cNvSpPr txBox="1"/>
           <p:nvPr/>
         </p:nvSpPr>
         <p:spPr>
           <a:xfrm>
-            <a:off x="685800" y="2194560"/>
+            <a:off x="4434839" y="4526280"/>
             <a:ext cx="3200400" cy="1234440"/>
           </a:xfrm>
           <a:prstGeom prst="rect">
@@ -11949,26 +12812,26 @@
           <a:p>
             <a:pPr algn="l"/>
             <a:r>
-              <a:rPr sz="1400" b="0">
+              <a:rPr sz="1300" b="0">
                 <a:solidFill>
                   <a:srgbClr val="26222E"/>
                 </a:solidFill>
               </a:rPr>
-              <a:t>CatalogONE owns products, prices, rules and approvals. Dynamics 365 stays the sales, quote and order front end.</a:t>
-            </a:r>
-          </a:p>
-        </p:txBody>
-      </p:sp>
-      <p:sp>
-        <p:nvSpPr>
-          <p:cNvPr id="10" name="Rectangle 9"/>
+              <a:t>Kafka + TMF620 to consuming applications. Dynamics 365 is named on CEP, not on the CatalogONE datasheet.</a:t>
+            </a:r>
+          </a:p>
+        </p:txBody>
+      </p:sp>
+      <p:sp>
+        <p:nvSpPr>
+          <p:cNvPr id="27" name="Rectangle 26"/>
           <p:cNvSpPr/>
           <p:nvPr/>
         </p:nvSpPr>
         <p:spPr>
           <a:xfrm>
-            <a:off x="4297679" y="1371600"/>
-            <a:ext cx="3474720" cy="2194560"/>
+            <a:off x="8046719" y="3794760"/>
+            <a:ext cx="3474720" cy="2103120"/>
           </a:xfrm>
           <a:prstGeom prst="rect">
             <a:avLst/>
@@ -12005,631 +12868,7 @@
       </p:sp>
       <p:sp>
         <p:nvSpPr>
-          <p:cNvPr id="11" name="Rectangle 10"/>
-          <p:cNvSpPr/>
-          <p:nvPr/>
-        </p:nvSpPr>
-        <p:spPr>
-          <a:xfrm>
-            <a:off x="4297679" y="1371600"/>
-            <a:ext cx="3474720" cy="91440"/>
-          </a:xfrm>
-          <a:prstGeom prst="rect">
-            <a:avLst/>
-          </a:prstGeom>
-          <a:solidFill>
-            <a:srgbClr val="0C294B"/>
-          </a:solidFill>
-          <a:ln>
-            <a:noFill/>
-          </a:ln>
-          <a:effectLst/>
-        </p:spPr>
-        <p:style>
-          <a:lnRef idx="1">
-            <a:schemeClr val="accent1"/>
-          </a:lnRef>
-          <a:fillRef idx="3">
-            <a:schemeClr val="accent1"/>
-          </a:fillRef>
-          <a:effectRef idx="2">
-            <a:schemeClr val="accent1"/>
-          </a:effectRef>
-          <a:fontRef idx="minor">
-            <a:schemeClr val="lt1"/>
-          </a:fontRef>
-        </p:style>
-        <p:txBody>
-          <a:bodyPr rtlCol="0" anchor="ctr"/>
-          <a:lstStyle/>
-          <a:p>
-            <a:pPr algn="ctr"/>
-          </a:p>
-        </p:txBody>
-      </p:sp>
-      <p:sp>
-        <p:nvSpPr>
-          <p:cNvPr id="12" name="TextBox 11"/>
-          <p:cNvSpPr txBox="1"/>
-          <p:nvPr/>
-        </p:nvSpPr>
-        <p:spPr>
-          <a:xfrm>
-            <a:off x="4434839" y="1645920"/>
-            <a:ext cx="3200400" cy="502920"/>
-          </a:xfrm>
-          <a:prstGeom prst="rect">
-            <a:avLst/>
-          </a:prstGeom>
-          <a:noFill/>
-        </p:spPr>
-        <p:txBody>
-          <a:bodyPr wrap="square" anchor="t" lIns="73152" rIns="73152" tIns="36576" bIns="36576">
-            <a:spAutoFit/>
-          </a:bodyPr>
-          <a:lstStyle/>
-          <a:p>
-            <a:pPr algn="l"/>
-            <a:r>
-              <a:rPr sz="1800" b="1">
-                <a:solidFill>
-                  <a:srgbClr val="0C294B"/>
-                </a:solidFill>
-              </a:rPr>
-              <a:t>One source of truth</a:t>
-            </a:r>
-          </a:p>
-        </p:txBody>
-      </p:sp>
-      <p:sp>
-        <p:nvSpPr>
-          <p:cNvPr id="13" name="TextBox 12"/>
-          <p:cNvSpPr txBox="1"/>
-          <p:nvPr/>
-        </p:nvSpPr>
-        <p:spPr>
-          <a:xfrm>
-            <a:off x="4434839" y="2194560"/>
-            <a:ext cx="3200400" cy="1234440"/>
-          </a:xfrm>
-          <a:prstGeom prst="rect">
-            <a:avLst/>
-          </a:prstGeom>
-          <a:noFill/>
-        </p:spPr>
-        <p:txBody>
-          <a:bodyPr wrap="square" anchor="t" lIns="73152" rIns="73152" tIns="36576" bIns="36576">
-            <a:spAutoFit/>
-          </a:bodyPr>
-          <a:lstStyle/>
-          <a:p>
-            <a:pPr algn="l"/>
-            <a:r>
-              <a:rPr sz="1400" b="0">
-                <a:solidFill>
-                  <a:srgbClr val="26222E"/>
-                </a:solidFill>
-              </a:rPr>
-              <a:t>Commercial and technical definitions live once. Dynamics, ordering and billing consume them.</a:t>
-            </a:r>
-          </a:p>
-        </p:txBody>
-      </p:sp>
-      <p:sp>
-        <p:nvSpPr>
-          <p:cNvPr id="14" name="Rectangle 13"/>
-          <p:cNvSpPr/>
-          <p:nvPr/>
-        </p:nvSpPr>
-        <p:spPr>
-          <a:xfrm>
-            <a:off x="8046719" y="1371600"/>
-            <a:ext cx="3474720" cy="2194560"/>
-          </a:xfrm>
-          <a:prstGeom prst="rect">
-            <a:avLst/>
-          </a:prstGeom>
-          <a:solidFill>
-            <a:srgbClr val="E8F0F8"/>
-          </a:solidFill>
-          <a:ln>
-            <a:noFill/>
-          </a:ln>
-          <a:effectLst/>
-        </p:spPr>
-        <p:style>
-          <a:lnRef idx="1">
-            <a:schemeClr val="accent1"/>
-          </a:lnRef>
-          <a:fillRef idx="3">
-            <a:schemeClr val="accent1"/>
-          </a:fillRef>
-          <a:effectRef idx="2">
-            <a:schemeClr val="accent1"/>
-          </a:effectRef>
-          <a:fontRef idx="minor">
-            <a:schemeClr val="lt1"/>
-          </a:fontRef>
-        </p:style>
-        <p:txBody>
-          <a:bodyPr rtlCol="0" anchor="ctr"/>
-          <a:lstStyle/>
-          <a:p>
-            <a:pPr algn="ctr"/>
-          </a:p>
-        </p:txBody>
-      </p:sp>
-      <p:sp>
-        <p:nvSpPr>
-          <p:cNvPr id="15" name="Rectangle 14"/>
-          <p:cNvSpPr/>
-          <p:nvPr/>
-        </p:nvSpPr>
-        <p:spPr>
-          <a:xfrm>
-            <a:off x="8046719" y="1371600"/>
-            <a:ext cx="3474720" cy="91440"/>
-          </a:xfrm>
-          <a:prstGeom prst="rect">
-            <a:avLst/>
-          </a:prstGeom>
-          <a:solidFill>
-            <a:srgbClr val="0C294B"/>
-          </a:solidFill>
-          <a:ln>
-            <a:noFill/>
-          </a:ln>
-          <a:effectLst/>
-        </p:spPr>
-        <p:style>
-          <a:lnRef idx="1">
-            <a:schemeClr val="accent1"/>
-          </a:lnRef>
-          <a:fillRef idx="3">
-            <a:schemeClr val="accent1"/>
-          </a:fillRef>
-          <a:effectRef idx="2">
-            <a:schemeClr val="accent1"/>
-          </a:effectRef>
-          <a:fontRef idx="minor">
-            <a:schemeClr val="lt1"/>
-          </a:fontRef>
-        </p:style>
-        <p:txBody>
-          <a:bodyPr rtlCol="0" anchor="ctr"/>
-          <a:lstStyle/>
-          <a:p>
-            <a:pPr algn="ctr"/>
-          </a:p>
-        </p:txBody>
-      </p:sp>
-      <p:sp>
-        <p:nvSpPr>
-          <p:cNvPr id="16" name="TextBox 15"/>
-          <p:cNvSpPr txBox="1"/>
-          <p:nvPr/>
-        </p:nvSpPr>
-        <p:spPr>
-          <a:xfrm>
-            <a:off x="8183879" y="1645920"/>
-            <a:ext cx="3200400" cy="502920"/>
-          </a:xfrm>
-          <a:prstGeom prst="rect">
-            <a:avLst/>
-          </a:prstGeom>
-          <a:noFill/>
-        </p:spPr>
-        <p:txBody>
-          <a:bodyPr wrap="square" anchor="t" lIns="73152" rIns="73152" tIns="36576" bIns="36576">
-            <a:spAutoFit/>
-          </a:bodyPr>
-          <a:lstStyle/>
-          <a:p>
-            <a:pPr algn="l"/>
-            <a:r>
-              <a:rPr sz="1800" b="1">
-                <a:solidFill>
-                  <a:srgbClr val="0C294B"/>
-                </a:solidFill>
-              </a:rPr>
-              <a:t>A governed journey</a:t>
-            </a:r>
-          </a:p>
-        </p:txBody>
-      </p:sp>
-      <p:sp>
-        <p:nvSpPr>
-          <p:cNvPr id="17" name="TextBox 16"/>
-          <p:cNvSpPr txBox="1"/>
-          <p:nvPr/>
-        </p:nvSpPr>
-        <p:spPr>
-          <a:xfrm>
-            <a:off x="8183879" y="2194560"/>
-            <a:ext cx="3200400" cy="1234440"/>
-          </a:xfrm>
-          <a:prstGeom prst="rect">
-            <a:avLst/>
-          </a:prstGeom>
-          <a:noFill/>
-        </p:spPr>
-        <p:txBody>
-          <a:bodyPr wrap="square" anchor="t" lIns="73152" rIns="73152" tIns="36576" bIns="36576">
-            <a:spAutoFit/>
-          </a:bodyPr>
-          <a:lstStyle/>
-          <a:p>
-            <a:pPr algn="l"/>
-            <a:r>
-              <a:rPr sz="1400" b="0">
-                <a:solidFill>
-                  <a:srgbClr val="26222E"/>
-                </a:solidFill>
-              </a:rPr>
-              <a:t>Ideation to end-of-life, with workflow, approvals, simulations and versioned change.</a:t>
-            </a:r>
-          </a:p>
-        </p:txBody>
-      </p:sp>
-      <p:sp>
-        <p:nvSpPr>
-          <p:cNvPr id="18" name="Rectangle 17"/>
-          <p:cNvSpPr/>
-          <p:nvPr/>
-        </p:nvSpPr>
-        <p:spPr>
-          <a:xfrm>
-            <a:off x="548640" y="3794760"/>
-            <a:ext cx="3474720" cy="2194560"/>
-          </a:xfrm>
-          <a:prstGeom prst="rect">
-            <a:avLst/>
-          </a:prstGeom>
-          <a:solidFill>
-            <a:srgbClr val="E8F0F8"/>
-          </a:solidFill>
-          <a:ln>
-            <a:noFill/>
-          </a:ln>
-          <a:effectLst/>
-        </p:spPr>
-        <p:style>
-          <a:lnRef idx="1">
-            <a:schemeClr val="accent1"/>
-          </a:lnRef>
-          <a:fillRef idx="3">
-            <a:schemeClr val="accent1"/>
-          </a:fillRef>
-          <a:effectRef idx="2">
-            <a:schemeClr val="accent1"/>
-          </a:effectRef>
-          <a:fontRef idx="minor">
-            <a:schemeClr val="lt1"/>
-          </a:fontRef>
-        </p:style>
-        <p:txBody>
-          <a:bodyPr rtlCol="0" anchor="ctr"/>
-          <a:lstStyle/>
-          <a:p>
-            <a:pPr algn="ctr"/>
-          </a:p>
-        </p:txBody>
-      </p:sp>
-      <p:sp>
-        <p:nvSpPr>
-          <p:cNvPr id="19" name="Rectangle 18"/>
-          <p:cNvSpPr/>
-          <p:nvPr/>
-        </p:nvSpPr>
-        <p:spPr>
-          <a:xfrm>
-            <a:off x="548640" y="3794760"/>
-            <a:ext cx="3474720" cy="91440"/>
-          </a:xfrm>
-          <a:prstGeom prst="rect">
-            <a:avLst/>
-          </a:prstGeom>
-          <a:solidFill>
-            <a:srgbClr val="0C294B"/>
-          </a:solidFill>
-          <a:ln>
-            <a:noFill/>
-          </a:ln>
-          <a:effectLst/>
-        </p:spPr>
-        <p:style>
-          <a:lnRef idx="1">
-            <a:schemeClr val="accent1"/>
-          </a:lnRef>
-          <a:fillRef idx="3">
-            <a:schemeClr val="accent1"/>
-          </a:fillRef>
-          <a:effectRef idx="2">
-            <a:schemeClr val="accent1"/>
-          </a:effectRef>
-          <a:fontRef idx="minor">
-            <a:schemeClr val="lt1"/>
-          </a:fontRef>
-        </p:style>
-        <p:txBody>
-          <a:bodyPr rtlCol="0" anchor="ctr"/>
-          <a:lstStyle/>
-          <a:p>
-            <a:pPr algn="ctr"/>
-          </a:p>
-        </p:txBody>
-      </p:sp>
-      <p:sp>
-        <p:nvSpPr>
-          <p:cNvPr id="20" name="TextBox 19"/>
-          <p:cNvSpPr txBox="1"/>
-          <p:nvPr/>
-        </p:nvSpPr>
-        <p:spPr>
-          <a:xfrm>
-            <a:off x="685800" y="4069080"/>
-            <a:ext cx="3200400" cy="502920"/>
-          </a:xfrm>
-          <a:prstGeom prst="rect">
-            <a:avLst/>
-          </a:prstGeom>
-          <a:noFill/>
-        </p:spPr>
-        <p:txBody>
-          <a:bodyPr wrap="square" anchor="t" lIns="73152" rIns="73152" tIns="36576" bIns="36576">
-            <a:spAutoFit/>
-          </a:bodyPr>
-          <a:lstStyle/>
-          <a:p>
-            <a:pPr algn="l"/>
-            <a:r>
-              <a:rPr sz="1800" b="1">
-                <a:solidFill>
-                  <a:srgbClr val="0C294B"/>
-                </a:solidFill>
-              </a:rPr>
-              <a:t>Business users configure</a:t>
-            </a:r>
-          </a:p>
-        </p:txBody>
-      </p:sp>
-      <p:sp>
-        <p:nvSpPr>
-          <p:cNvPr id="21" name="TextBox 20"/>
-          <p:cNvSpPr txBox="1"/>
-          <p:nvPr/>
-        </p:nvSpPr>
-        <p:spPr>
-          <a:xfrm>
-            <a:off x="685800" y="4617720"/>
-            <a:ext cx="3200400" cy="1234440"/>
-          </a:xfrm>
-          <a:prstGeom prst="rect">
-            <a:avLst/>
-          </a:prstGeom>
-          <a:noFill/>
-        </p:spPr>
-        <p:txBody>
-          <a:bodyPr wrap="square" anchor="t" lIns="73152" rIns="73152" tIns="36576" bIns="36576">
-            <a:spAutoFit/>
-          </a:bodyPr>
-          <a:lstStyle/>
-          <a:p>
-            <a:pPr algn="l"/>
-            <a:r>
-              <a:rPr sz="1400" b="0">
-                <a:solidFill>
-                  <a:srgbClr val="26222E"/>
-                </a:solidFill>
-              </a:rPr>
-              <a:t>Role-based UI, templates and building blocks. No code. No deployment overhead.</a:t>
-            </a:r>
-          </a:p>
-        </p:txBody>
-      </p:sp>
-      <p:sp>
-        <p:nvSpPr>
-          <p:cNvPr id="22" name="Rectangle 21"/>
-          <p:cNvSpPr/>
-          <p:nvPr/>
-        </p:nvSpPr>
-        <p:spPr>
-          <a:xfrm>
-            <a:off x="4297679" y="3794760"/>
-            <a:ext cx="3474720" cy="2194560"/>
-          </a:xfrm>
-          <a:prstGeom prst="rect">
-            <a:avLst/>
-          </a:prstGeom>
-          <a:solidFill>
-            <a:srgbClr val="E8F0F8"/>
-          </a:solidFill>
-          <a:ln>
-            <a:noFill/>
-          </a:ln>
-          <a:effectLst/>
-        </p:spPr>
-        <p:style>
-          <a:lnRef idx="1">
-            <a:schemeClr val="accent1"/>
-          </a:lnRef>
-          <a:fillRef idx="3">
-            <a:schemeClr val="accent1"/>
-          </a:fillRef>
-          <a:effectRef idx="2">
-            <a:schemeClr val="accent1"/>
-          </a:effectRef>
-          <a:fontRef idx="minor">
-            <a:schemeClr val="lt1"/>
-          </a:fontRef>
-        </p:style>
-        <p:txBody>
-          <a:bodyPr rtlCol="0" anchor="ctr"/>
-          <a:lstStyle/>
-          <a:p>
-            <a:pPr algn="ctr"/>
-          </a:p>
-        </p:txBody>
-      </p:sp>
-      <p:sp>
-        <p:nvSpPr>
-          <p:cNvPr id="23" name="Rectangle 22"/>
-          <p:cNvSpPr/>
-          <p:nvPr/>
-        </p:nvSpPr>
-        <p:spPr>
-          <a:xfrm>
-            <a:off x="4297679" y="3794760"/>
-            <a:ext cx="3474720" cy="91440"/>
-          </a:xfrm>
-          <a:prstGeom prst="rect">
-            <a:avLst/>
-          </a:prstGeom>
-          <a:solidFill>
-            <a:srgbClr val="0C294B"/>
-          </a:solidFill>
-          <a:ln>
-            <a:noFill/>
-          </a:ln>
-          <a:effectLst/>
-        </p:spPr>
-        <p:style>
-          <a:lnRef idx="1">
-            <a:schemeClr val="accent1"/>
-          </a:lnRef>
-          <a:fillRef idx="3">
-            <a:schemeClr val="accent1"/>
-          </a:fillRef>
-          <a:effectRef idx="2">
-            <a:schemeClr val="accent1"/>
-          </a:effectRef>
-          <a:fontRef idx="minor">
-            <a:schemeClr val="lt1"/>
-          </a:fontRef>
-        </p:style>
-        <p:txBody>
-          <a:bodyPr rtlCol="0" anchor="ctr"/>
-          <a:lstStyle/>
-          <a:p>
-            <a:pPr algn="ctr"/>
-          </a:p>
-        </p:txBody>
-      </p:sp>
-      <p:sp>
-        <p:nvSpPr>
-          <p:cNvPr id="24" name="TextBox 23"/>
-          <p:cNvSpPr txBox="1"/>
-          <p:nvPr/>
-        </p:nvSpPr>
-        <p:spPr>
-          <a:xfrm>
-            <a:off x="4434839" y="4069080"/>
-            <a:ext cx="3200400" cy="502920"/>
-          </a:xfrm>
-          <a:prstGeom prst="rect">
-            <a:avLst/>
-          </a:prstGeom>
-          <a:noFill/>
-        </p:spPr>
-        <p:txBody>
-          <a:bodyPr wrap="square" anchor="t" lIns="73152" rIns="73152" tIns="36576" bIns="36576">
-            <a:spAutoFit/>
-          </a:bodyPr>
-          <a:lstStyle/>
-          <a:p>
-            <a:pPr algn="l"/>
-            <a:r>
-              <a:rPr sz="1800" b="1">
-                <a:solidFill>
-                  <a:srgbClr val="0C294B"/>
-                </a:solidFill>
-              </a:rPr>
-              <a:t>Publish, do not re-key</a:t>
-            </a:r>
-          </a:p>
-        </p:txBody>
-      </p:sp>
-      <p:sp>
-        <p:nvSpPr>
-          <p:cNvPr id="25" name="TextBox 24"/>
-          <p:cNvSpPr txBox="1"/>
-          <p:nvPr/>
-        </p:nvSpPr>
-        <p:spPr>
-          <a:xfrm>
-            <a:off x="4434839" y="4617720"/>
-            <a:ext cx="3200400" cy="1234440"/>
-          </a:xfrm>
-          <a:prstGeom prst="rect">
-            <a:avLst/>
-          </a:prstGeom>
-          <a:noFill/>
-        </p:spPr>
-        <p:txBody>
-          <a:bodyPr wrap="square" anchor="t" lIns="73152" rIns="73152" tIns="36576" bIns="36576">
-            <a:spAutoFit/>
-          </a:bodyPr>
-          <a:lstStyle/>
-          <a:p>
-            <a:pPr algn="l"/>
-            <a:r>
-              <a:rPr sz="1400" b="0">
-                <a:solidFill>
-                  <a:srgbClr val="26222E"/>
-                </a:solidFill>
-              </a:rPr>
-              <a:t>Master catalog + Kafka + TMF620 events push Active products into Dynamics.</a:t>
-            </a:r>
-          </a:p>
-        </p:txBody>
-      </p:sp>
-      <p:sp>
-        <p:nvSpPr>
-          <p:cNvPr id="26" name="Rectangle 25"/>
-          <p:cNvSpPr/>
-          <p:nvPr/>
-        </p:nvSpPr>
-        <p:spPr>
-          <a:xfrm>
-            <a:off x="8046719" y="3794760"/>
-            <a:ext cx="3474720" cy="2194560"/>
-          </a:xfrm>
-          <a:prstGeom prst="rect">
-            <a:avLst/>
-          </a:prstGeom>
-          <a:solidFill>
-            <a:srgbClr val="E8F0F8"/>
-          </a:solidFill>
-          <a:ln>
-            <a:noFill/>
-          </a:ln>
-          <a:effectLst/>
-        </p:spPr>
-        <p:style>
-          <a:lnRef idx="1">
-            <a:schemeClr val="accent1"/>
-          </a:lnRef>
-          <a:fillRef idx="3">
-            <a:schemeClr val="accent1"/>
-          </a:fillRef>
-          <a:effectRef idx="2">
-            <a:schemeClr val="accent1"/>
-          </a:effectRef>
-          <a:fontRef idx="minor">
-            <a:schemeClr val="lt1"/>
-          </a:fontRef>
-        </p:style>
-        <p:txBody>
-          <a:bodyPr rtlCol="0" anchor="ctr"/>
-          <a:lstStyle/>
-          <a:p>
-            <a:pPr algn="ctr"/>
-          </a:p>
-        </p:txBody>
-      </p:sp>
-      <p:sp>
-        <p:nvSpPr>
-          <p:cNvPr id="27" name="Rectangle 26"/>
+          <p:cNvPr id="28" name="Rectangle 27"/>
           <p:cNvSpPr/>
           <p:nvPr/>
         </p:nvSpPr>
@@ -12673,14 +12912,14 @@
       </p:sp>
       <p:sp>
         <p:nvSpPr>
-          <p:cNvPr id="28" name="TextBox 27"/>
+          <p:cNvPr id="29" name="TextBox 28"/>
           <p:cNvSpPr txBox="1"/>
           <p:nvPr/>
         </p:nvSpPr>
         <p:spPr>
           <a:xfrm>
-            <a:off x="8183879" y="4069080"/>
-            <a:ext cx="3200400" cy="502920"/>
+            <a:off x="8183879" y="4023360"/>
+            <a:ext cx="3200400" cy="457200"/>
           </a:xfrm>
           <a:prstGeom prst="rect">
             <a:avLst/>
@@ -12695,7 +12934,7 @@
           <a:p>
             <a:pPr algn="l"/>
             <a:r>
-              <a:rPr sz="1800" b="1">
+              <a:rPr sz="1700" b="1">
                 <a:solidFill>
                   <a:srgbClr val="0C294B"/>
                 </a:solidFill>
@@ -12707,13 +12946,13 @@
       </p:sp>
       <p:sp>
         <p:nvSpPr>
-          <p:cNvPr id="29" name="TextBox 28"/>
+          <p:cNvPr id="30" name="TextBox 29"/>
           <p:cNvSpPr txBox="1"/>
           <p:nvPr/>
         </p:nvSpPr>
         <p:spPr>
           <a:xfrm>
-            <a:off x="8183879" y="4617720"/>
+            <a:off x="8183879" y="4526280"/>
             <a:ext cx="3200400" cy="1234440"/>
           </a:xfrm>
           <a:prstGeom prst="rect">
@@ -12729,7 +12968,7 @@
           <a:p>
             <a:pPr algn="l"/>
             <a:r>
-              <a:rPr sz="1400" b="0">
+              <a:rPr sz="1300" b="0">
                 <a:solidFill>
                   <a:srgbClr val="26222E"/>
                 </a:solidFill>
@@ -12864,7 +13103,7 @@
                   <a:srgbClr val="5F5A6B"/>
                 </a:solidFill>
               </a:rPr>
-              <a:t>TMF620 defines the statuses. CatalogONE PLM runs them. Dynamics only sees Active / Launched.</a:t>
+              <a:t>TMF620 defines the statuses. CatalogONE PLM runs them. CRM sees Active / Launched after publish.</a:t>
             </a:r>
           </a:p>
         </p:txBody>
@@ -12898,7 +13137,7 @@
                   <a:srgbClr val="5F5A6B"/>
                 </a:solidFill>
               </a:rPr>
-              <a:t>PLC study  |  Amdocs CatalogONE: from idea to Dynamics 365</a:t>
+              <a:t>PLC study  |  Amdocs CatalogONE: from idea to CRM</a:t>
             </a:r>
           </a:p>
         </p:txBody>
@@ -13967,7 +14206,7 @@
                   <a:srgbClr val="0078D4"/>
                 </a:solidFill>
               </a:rPr>
-              <a:t>Dynamics 365: visible to sales</a:t>
+              <a:t>Sales CRM: visible after publish</a:t>
             </a:r>
           </a:p>
         </p:txBody>
@@ -14131,7 +14370,7 @@
                   <a:srgbClr val="5F5A6B"/>
                 </a:solidFill>
               </a:rPr>
-              <a:t>Standalone telecom catalog + PLM. Modular. Does not replace Dynamics.</a:t>
+              <a:t>Standalone telecom catalog + PLM. Modular. Does not replace CRM.</a:t>
             </a:r>
           </a:p>
         </p:txBody>
@@ -14165,7 +14404,7 @@
                   <a:srgbClr val="5F5A6B"/>
                 </a:solidFill>
               </a:rPr>
-              <a:t>PLC study  |  Amdocs CatalogONE: from idea to Dynamics 365</a:t>
+              <a:t>PLC study  |  Amdocs CatalogONE: from idea to CRM</a:t>
             </a:r>
           </a:p>
         </p:txBody>
@@ -14819,7 +15058,7 @@
                   <a:srgbClr val="0C294B"/>
                 </a:solidFill>
               </a:rPr>
-              <a:t>Catalog is a module of its own. Sales is Dynamics 365.</a:t>
+              <a:t>Where Dynamics 365 is named: the Amdocs–Microsoft platform</a:t>
             </a:r>
           </a:p>
         </p:txBody>
@@ -14853,7 +15092,7 @@
                   <a:srgbClr val="5F5A6B"/>
                 </a:solidFill>
               </a:rPr>
-              <a:t>Amdocs–Microsoft Customer Engagement Platform: unified catalog + Dynamics CRM</a:t>
+              <a:t>CEP puts Catalog next to Dynamics. CatalogONE datasheets do not name Dynamics.</a:t>
             </a:r>
           </a:p>
         </p:txBody>
@@ -14887,7 +15126,7 @@
                   <a:srgbClr val="5F5A6B"/>
                 </a:solidFill>
               </a:rPr>
-              <a:t>PLC study  |  Amdocs CatalogONE: from idea to Dynamics 365</a:t>
+              <a:t>PLC study  |  Amdocs CatalogONE: from idea to CRM</a:t>
             </a:r>
           </a:p>
         </p:txBody>
@@ -15023,7 +15262,7 @@
                   <a:srgbClr val="5F5A6B"/>
                 </a:solidFill>
               </a:rPr>
-              <a:t>Source: Amdocs and Microsoft CEP paper, p.3</a:t>
+              <a:t>Source: Amdocs and Microsoft CEP paper, p.3 — this is CEP, not a CatalogONE datasheet</a:t>
             </a:r>
           </a:p>
         </p:txBody>
@@ -15213,7 +15452,7 @@
                   <a:srgbClr val="0C294B"/>
                 </a:solidFill>
               </a:rPr>
-              <a:t>Sales (Dynamics 365)</a:t>
+              <a:t>Sales / Service (Dynamics 365)</a:t>
             </a:r>
           </a:p>
         </p:txBody>
@@ -15247,7 +15486,7 @@
                   <a:srgbClr val="26222E"/>
                 </a:solidFill>
               </a:rPr>
-              <a:t>Quotes, orders, account managers. Consumes the catalog.</a:t>
+              <a:t>In CEP, quotes, orders and cases sit here. CRM is not replaced.</a:t>
             </a:r>
           </a:p>
         </p:txBody>
@@ -15325,7 +15564,7 @@
                   <a:srgbClr val="0C294B"/>
                 </a:solidFill>
               </a:rPr>
-              <a:t>Why it matters</a:t>
+              <a:t>Live operator: PLDT</a:t>
             </a:r>
           </a:p>
         </p:txBody>
@@ -15359,7 +15598,7 @@
                   <a:srgbClr val="26222E"/>
                 </a:solidFill>
               </a:rPr>
-              <a:t>CRM is not replaced. Approved products are published into it.</a:t>
+              <a:t>IDC 2026: case management on CEP. Agents use Dynamics 365. Care, not a CatalogONE catalog feed.</a:t>
             </a:r>
           </a:p>
         </p:txBody>
@@ -15523,7 +15762,7 @@
                   <a:srgbClr val="5F5A6B"/>
                 </a:solidFill>
               </a:rPr>
-              <a:t>PLC study  |  Amdocs CatalogONE: from idea to Dynamics 365</a:t>
+              <a:t>PLC study  |  Amdocs CatalogONE: from idea to CRM</a:t>
             </a:r>
           </a:p>
         </p:txBody>
@@ -16479,7 +16718,7 @@
                   <a:srgbClr val="5F5A6B"/>
                 </a:solidFill>
               </a:rPr>
-              <a:t>PLC study  |  Amdocs CatalogONE: from idea to Dynamics 365</a:t>
+              <a:t>PLC study  |  Amdocs CatalogONE: from idea to CRM</a:t>
             </a:r>
           </a:p>
         </p:txBody>
@@ -17773,7 +18012,7 @@
                   <a:srgbClr val="5F5A6B"/>
                 </a:solidFill>
               </a:rPr>
-              <a:t>PLC study  |  Amdocs CatalogONE: from idea to Dynamics 365</a:t>
+              <a:t>PLC study  |  Amdocs CatalogONE: from idea to CRM</a:t>
             </a:r>
           </a:p>
         </p:txBody>
@@ -18871,7 +19110,7 @@
                   <a:srgbClr val="26222E"/>
                 </a:solidFill>
               </a:rPr>
-              <a:t>Pass: Active, ready for Dynamics</a:t>
+              <a:t>Pass: Active, ready to publish</a:t>
             </a:r>
           </a:p>
           <a:p>

--- a/plc_study/PLC_CatalogONE_Presentation.pptx
+++ b/plc_study/PLC_CatalogONE_Presentation.pptx
@@ -3883,7 +3883,7 @@
                   <a:srgbClr val="E8F0F8"/>
                 </a:solidFill>
               </a:rPr>
-              <a:t>Prepared by: [Your name]   |   October 2026   |   Draft 3</a:t>
+              <a:t>Prepared by: [Your name]   |   October 2026   |   Draft 4</a:t>
             </a:r>
           </a:p>
         </p:txBody>
@@ -8818,7 +8818,7 @@
                   <a:srgbClr val="5F5A6B"/>
                 </a:solidFill>
               </a:rPr>
-              <a:t>Pre-built Catalog+Dynamics is CEP. Not a CatalogONE AppSource connector.</a:t>
+              <a:t>Pre-built Catalog+Dynamics is the Customer Engagement Platform. Not a CatalogONE plug-in.</a:t>
             </a:r>
           </a:p>
         </p:txBody>
@@ -9142,7 +9142,7 @@
                   <a:srgbClr val="0C294B"/>
                 </a:solidFill>
               </a:rPr>
-              <a:t>Two paths: buy CEP (Catalog next to Dynamics, documented) or keep Dynamics and integrate via TMF620 / Kafka (CatalogONE pattern for any CRM).</a:t>
+              <a:t>Two paths: buy the Customer Engagement Platform, or keep Dynamics and integrate CatalogONE via TMF620 / Kafka.</a:t>
             </a:r>
           </a:p>
         </p:txBody>
@@ -10400,7 +10400,7 @@
               <a:buChar char="•"/>
             </a:pPr>
             <a:r>
-              <a:rPr b="1" sz="1500">
+              <a:rPr b="1" sz="1400">
                 <a:solidFill>
                   <a:srgbClr val="0C294B"/>
                 </a:solidFill>
@@ -10408,7 +10408,7 @@
               <a:t>Idea to Active </a:t>
             </a:r>
             <a:r>
-              <a:rPr sz="1500">
+              <a:rPr sz="1400">
                 <a:solidFill>
                   <a:srgbClr val="26222E"/>
                 </a:solidFill>
@@ -10424,7 +10424,7 @@
               <a:buChar char="•"/>
             </a:pPr>
             <a:r>
-              <a:rPr b="1" sz="1500">
+              <a:rPr b="1" sz="1400">
                 <a:solidFill>
                   <a:srgbClr val="0C294B"/>
                 </a:solidFill>
@@ -10432,7 +10432,7 @@
               <a:t>CatalogONE publishes </a:t>
             </a:r>
             <a:r>
-              <a:rPr sz="1500">
+              <a:rPr sz="1400">
                 <a:solidFill>
                   <a:srgbClr val="26222E"/>
                 </a:solidFill>
@@ -10448,20 +10448,20 @@
               <a:buChar char="•"/>
             </a:pPr>
             <a:r>
-              <a:rPr b="1" sz="1500">
+              <a:rPr b="1" sz="1400">
                 <a:solidFill>
                   <a:srgbClr val="0C294B"/>
                 </a:solidFill>
               </a:rPr>
-              <a:t>Dynamics 365 is named on CEP, </a:t>
-            </a:r>
-            <a:r>
-              <a:rPr sz="1500">
+              <a:t>Dynamics 365 is named on the Customer Engagement Platform, </a:t>
+            </a:r>
+            <a:r>
+              <a:rPr sz="1400">
                 <a:solidFill>
                   <a:srgbClr val="26222E"/>
                 </a:solidFill>
               </a:rPr>
-              <a:t>as Sales and Customer Service next to Catalog — not on the CatalogONE datasheet as a connector. PLDT is live on CEP care.</a:t>
+              <a:t>as Sales and Customer Service next to Catalog — not on the CatalogONE datasheet. PLDT is live on that platform for care.</a:t>
             </a:r>
           </a:p>
           <a:p>
@@ -10472,7 +10472,7 @@
               <a:buChar char="•"/>
             </a:pPr>
             <a:r>
-              <a:rPr b="1" sz="1500">
+              <a:rPr b="1" sz="1400">
                 <a:solidFill>
                   <a:srgbClr val="0C294B"/>
                 </a:solidFill>
@@ -10480,12 +10480,12 @@
               <a:t>Two paths: </a:t>
             </a:r>
             <a:r>
-              <a:rPr sz="1500">
+              <a:rPr sz="1400">
                 <a:solidFill>
                   <a:srgbClr val="26222E"/>
                 </a:solidFill>
               </a:rPr>
-              <a:t>buy CEP, or keep Dynamics and integrate via TMF620. CRM is not replaced.</a:t>
+              <a:t>buy the Customer Engagement Platform, or keep Dynamics and integrate CatalogONE via TMF620. CRM is not replaced.</a:t>
             </a:r>
           </a:p>
           <a:p>
@@ -10496,7 +10496,7 @@
               <a:buChar char="•"/>
             </a:pPr>
             <a:r>
-              <a:rPr b="1" sz="1500">
+              <a:rPr b="1" sz="1400">
                 <a:solidFill>
                   <a:srgbClr val="0C294B"/>
                 </a:solidFill>
@@ -10504,7 +10504,7 @@
               <a:t>Changes are versioned, </a:t>
             </a:r>
             <a:r>
-              <a:rPr sz="1500">
+              <a:rPr sz="1400">
                 <a:solidFill>
                   <a:srgbClr val="26222E"/>
                 </a:solidFill>
@@ -10520,7 +10520,7 @@
               <a:buChar char="•"/>
             </a:pPr>
             <a:r>
-              <a:rPr b="1" sz="1500">
+              <a:rPr b="1" sz="1400">
                 <a:solidFill>
                   <a:srgbClr val="0C294B"/>
                 </a:solidFill>
@@ -10528,12 +10528,12 @@
               <a:t>Proven CatalogONE </a:t>
             </a:r>
             <a:r>
-              <a:rPr sz="1500">
+              <a:rPr sz="1400">
                 <a:solidFill>
                   <a:srgbClr val="26222E"/>
                 </a:solidFill>
               </a:rPr>
-              <a:t>at a European quad-play, Sprint / T-Mobile and KT. CEP + Dynamics 365 is live at PLDT for case management.</a:t>
+              <a:t>at a European quad-play, Sprint / T-Mobile and KT. Customer Engagement Platform + Dynamics 365 is live at PLDT for case management.</a:t>
             </a:r>
           </a:p>
         </p:txBody>
@@ -11693,7 +11693,7 @@
                   <a:srgbClr val="5F5A6B"/>
                 </a:solidFill>
               </a:rPr>
-              <a:t>CatalogONE vs CEP vs Dynamics</a:t>
+              <a:t>CatalogONE vs Customer Engagement Platform</a:t>
             </a:r>
           </a:p>
         </p:txBody>
@@ -11969,7 +11969,7 @@
                   <a:srgbClr val="5F5A6B"/>
                 </a:solidFill>
               </a:rPr>
-              <a:t>Two facts, kept separate: CatalogONE publishes to CRM. CEP names Dynamics 365.</a:t>
+              <a:t>Two facts, kept separate: CatalogONE publishes to CRM. The Customer Engagement Platform names Dynamics 365.</a:t>
             </a:r>
           </a:p>
         </p:txBody>
@@ -12817,7 +12817,7 @@
                   <a:srgbClr val="26222E"/>
                 </a:solidFill>
               </a:rPr>
-              <a:t>Kafka + TMF620 to consuming applications. Dynamics 365 is named on CEP, not on the CatalogONE datasheet.</a:t>
+              <a:t>Kafka + TMF620 to consuming applications. Dynamics 365 is named on the Amdocs–Microsoft platform, not on CatalogONE.</a:t>
             </a:r>
           </a:p>
         </p:txBody>
@@ -15058,7 +15058,7 @@
                   <a:srgbClr val="0C294B"/>
                 </a:solidFill>
               </a:rPr>
-              <a:t>Where Dynamics 365 is named: the Amdocs–Microsoft platform</a:t>
+              <a:t>Where Dynamics 365 is named: Customer Engagement Platform (CEP)</a:t>
             </a:r>
           </a:p>
         </p:txBody>
@@ -15092,7 +15092,7 @@
                   <a:srgbClr val="5F5A6B"/>
                 </a:solidFill>
               </a:rPr>
-              <a:t>CEP puts Catalog next to Dynamics. CatalogONE datasheets do not name Dynamics.</a:t>
+              <a:t>CEP = Amdocs catalog + CPQ + commerce + OM, on Dynamics 365. Not a CatalogONE plug-in.</a:t>
             </a:r>
           </a:p>
         </p:txBody>
